--- a/rocketmq-bench/RocketMQ三方案对比.pptx
+++ b/rocketmq-bench/RocketMQ三方案对比.pptx
@@ -23,6 +23,7 @@
     <p:sldId id="271" r:id="rId17"/>
     <p:sldId id="272" r:id="rId18"/>
     <p:sldId id="273" r:id="rId19"/>
+    <p:sldId id="274" r:id="rId20"/>
   </p:sldIdLst>
   <p:sldSz cx="12192000" cy="6858000"/>
   <p:notesSz cx="6858000" cy="9144000"/>
@@ -1358,7 +1359,7 @@
           <a:p>
             <a:fld id="{5BCAD085-E8A6-8845-BD4E-CB4CCA059FC4}" type="datetimeFigureOut">
               <a:rPr lang="en-US" smtClean="0"/>
-              <a:t>6/28/2026</a:t>
+              <a:t>6/29/2026</a:t>
             </a:fld>
             <a:endParaRPr lang="en-US"/>
           </a:p>
@@ -1526,7 +1527,7 @@
           <a:p>
             <a:fld id="{5BCAD085-E8A6-8845-BD4E-CB4CCA059FC4}" type="datetimeFigureOut">
               <a:rPr lang="en-US" smtClean="0"/>
-              <a:t>6/28/2026</a:t>
+              <a:t>6/29/2026</a:t>
             </a:fld>
             <a:endParaRPr lang="en-US"/>
           </a:p>
@@ -1704,7 +1705,7 @@
           <a:p>
             <a:fld id="{5BCAD085-E8A6-8845-BD4E-CB4CCA059FC4}" type="datetimeFigureOut">
               <a:rPr lang="en-US" smtClean="0"/>
-              <a:t>6/28/2026</a:t>
+              <a:t>6/29/2026</a:t>
             </a:fld>
             <a:endParaRPr lang="en-US"/>
           </a:p>
@@ -1872,7 +1873,7 @@
           <a:p>
             <a:fld id="{5BCAD085-E8A6-8845-BD4E-CB4CCA059FC4}" type="datetimeFigureOut">
               <a:rPr lang="en-US" smtClean="0"/>
-              <a:t>6/28/2026</a:t>
+              <a:t>6/29/2026</a:t>
             </a:fld>
             <a:endParaRPr lang="en-US"/>
           </a:p>
@@ -2117,7 +2118,7 @@
           <a:p>
             <a:fld id="{5BCAD085-E8A6-8845-BD4E-CB4CCA059FC4}" type="datetimeFigureOut">
               <a:rPr lang="en-US" smtClean="0"/>
-              <a:t>6/28/2026</a:t>
+              <a:t>6/29/2026</a:t>
             </a:fld>
             <a:endParaRPr lang="en-US"/>
           </a:p>
@@ -2402,7 +2403,7 @@
           <a:p>
             <a:fld id="{5BCAD085-E8A6-8845-BD4E-CB4CCA059FC4}" type="datetimeFigureOut">
               <a:rPr lang="en-US" smtClean="0"/>
-              <a:t>6/28/2026</a:t>
+              <a:t>6/29/2026</a:t>
             </a:fld>
             <a:endParaRPr lang="en-US"/>
           </a:p>
@@ -2821,7 +2822,7 @@
           <a:p>
             <a:fld id="{5BCAD085-E8A6-8845-BD4E-CB4CCA059FC4}" type="datetimeFigureOut">
               <a:rPr lang="en-US" smtClean="0"/>
-              <a:t>6/28/2026</a:t>
+              <a:t>6/29/2026</a:t>
             </a:fld>
             <a:endParaRPr lang="en-US"/>
           </a:p>
@@ -2938,7 +2939,7 @@
           <a:p>
             <a:fld id="{5BCAD085-E8A6-8845-BD4E-CB4CCA059FC4}" type="datetimeFigureOut">
               <a:rPr lang="en-US" smtClean="0"/>
-              <a:t>6/28/2026</a:t>
+              <a:t>6/29/2026</a:t>
             </a:fld>
             <a:endParaRPr lang="en-US"/>
           </a:p>
@@ -3033,7 +3034,7 @@
           <a:p>
             <a:fld id="{5BCAD085-E8A6-8845-BD4E-CB4CCA059FC4}" type="datetimeFigureOut">
               <a:rPr lang="en-US" smtClean="0"/>
-              <a:t>6/28/2026</a:t>
+              <a:t>6/29/2026</a:t>
             </a:fld>
             <a:endParaRPr lang="en-US"/>
           </a:p>
@@ -3308,7 +3309,7 @@
           <a:p>
             <a:fld id="{5BCAD085-E8A6-8845-BD4E-CB4CCA059FC4}" type="datetimeFigureOut">
               <a:rPr lang="en-US" smtClean="0"/>
-              <a:t>6/28/2026</a:t>
+              <a:t>6/29/2026</a:t>
             </a:fld>
             <a:endParaRPr lang="en-US"/>
           </a:p>
@@ -3560,7 +3561,7 @@
           <a:p>
             <a:fld id="{5BCAD085-E8A6-8845-BD4E-CB4CCA059FC4}" type="datetimeFigureOut">
               <a:rPr lang="en-US" smtClean="0"/>
-              <a:t>6/28/2026</a:t>
+              <a:t>6/29/2026</a:t>
             </a:fld>
             <a:endParaRPr lang="en-US"/>
           </a:p>
@@ -3771,7 +3772,7 @@
           <a:p>
             <a:fld id="{5BCAD085-E8A6-8845-BD4E-CB4CCA059FC4}" type="datetimeFigureOut">
               <a:rPr lang="en-US" smtClean="0"/>
-              <a:t>6/28/2026</a:t>
+              <a:t>6/29/2026</a:t>
             </a:fld>
             <a:endParaRPr lang="en-US"/>
           </a:p>
@@ -7949,7 +7950,7 @@
                 </a:solidFill>
                 <a:latin typeface="Microsoft YaHei"/>
               </a:rPr>
-              <a:t>首选 A · DLedger 跨AZ</a:t>
+              <a:t>首选 C · 主从 跨AZ</a:t>
             </a:r>
           </a:p>
         </p:txBody>
@@ -7988,7 +7989,7 @@
                 </a:solidFill>
                 <a:latin typeface="Microsoft YaHei"/>
               </a:rPr>
-              <a:t>金融级 / 强一致核心业务</a:t>
+              <a:t>兼顾性能与 AZ 级容灾</a:t>
             </a:r>
           </a:p>
         </p:txBody>
@@ -8030,7 +8031,7 @@
                 </a:solidFill>
                 <a:latin typeface="Microsoft YaHei"/>
               </a:rPr>
-              <a:t>• 要求自动故障转移、无人工介入</a:t>
+              <a:t>• 吞吐较高(64线程 67K)、单 AZ 掉电 RPO=0</a:t>
             </a:r>
           </a:p>
           <a:p>
@@ -8049,7 +8050,7 @@
                 </a:solidFill>
                 <a:latin typeface="Microsoft YaHei"/>
               </a:rPr>
-              <a:t>• 硬断电 RTO 最短(~33s)、RPO=0 协议级保证</a:t>
+              <a:t>• 无自动选主，依赖客户端重试 + 多组横跨兜底</a:t>
             </a:r>
           </a:p>
         </p:txBody>
@@ -8091,7 +8092,7 @@
                 </a:solidFill>
                 <a:latin typeface="Microsoft YaHei"/>
               </a:rPr>
-              <a:t>• 可接受较低单机吞吐与更多节点(9台)</a:t>
+              <a:t>• 硬断电 RTO ~110~130s，需可容忍</a:t>
             </a:r>
           </a:p>
           <a:p>
@@ -8110,7 +8111,7 @@
                 </a:solidFill>
                 <a:latin typeface="Microsoft YaHei"/>
               </a:rPr>
-              <a:t>• 典型：交易、计费、订单等不可丢消息场景</a:t>
+              <a:t>• 典型：高吞吐且要求跨 AZ 容灾的一般业务</a:t>
             </a:r>
           </a:p>
         </p:txBody>
@@ -8239,7 +8240,7 @@
                 </a:solidFill>
                 <a:latin typeface="Microsoft YaHei"/>
               </a:rPr>
-              <a:t>次选 C · 主从 跨AZ</a:t>
+              <a:t>次选 A · DLedger 跨AZ</a:t>
             </a:r>
           </a:p>
         </p:txBody>
@@ -8278,7 +8279,7 @@
                 </a:solidFill>
                 <a:latin typeface="Microsoft YaHei"/>
               </a:rPr>
-              <a:t>兼顾性能与 AZ 级容灾</a:t>
+              <a:t>金融级 / 强一致核心业务</a:t>
             </a:r>
           </a:p>
         </p:txBody>
@@ -8320,7 +8321,7 @@
                 </a:solidFill>
                 <a:latin typeface="Microsoft YaHei"/>
               </a:rPr>
-              <a:t>• 吞吐较高(64线程 67K)、单 AZ 掉电 RPO=0</a:t>
+              <a:t>• 要求自动故障转移、无人工介入</a:t>
             </a:r>
           </a:p>
           <a:p>
@@ -8339,7 +8340,7 @@
                 </a:solidFill>
                 <a:latin typeface="Microsoft YaHei"/>
               </a:rPr>
-              <a:t>• 无自动选主，依赖客户端重试 + 多组横跨兜底</a:t>
+              <a:t>• 硬断电 RTO 最短(~33s)、RPO=0 协议级保证</a:t>
             </a:r>
           </a:p>
         </p:txBody>
@@ -8381,7 +8382,7 @@
                 </a:solidFill>
                 <a:latin typeface="Microsoft YaHei"/>
               </a:rPr>
-              <a:t>• 硬断电 RTO ~110~130s，需可容忍</a:t>
+              <a:t>• 可接受较低单机吞吐与更多节点(9台)</a:t>
             </a:r>
           </a:p>
           <a:p>
@@ -8400,7 +8401,7 @@
                 </a:solidFill>
                 <a:latin typeface="Microsoft YaHei"/>
               </a:rPr>
-              <a:t>• 典型：高吞吐且要求跨 AZ 容灾的一般业务</a:t>
+              <a:t>• 典型：交易、计费、订单等不可丢消息场景</a:t>
             </a:r>
           </a:p>
         </p:txBody>
@@ -9154,7 +9155,7 @@
                 </a:solidFill>
                 <a:latin typeface="Microsoft YaHei"/>
               </a:rPr>
-              <a:t>● </a:t>
+              <a:t xml:space="preserve">● </a:t>
             </a:r>
             <a:r>
               <a:rPr sz="1350" b="1" i="0">
@@ -9237,7 +9238,7 @@
                 </a:solidFill>
                 <a:latin typeface="Microsoft YaHei"/>
               </a:rPr>
-              <a:t>● </a:t>
+              <a:t xml:space="preserve">● </a:t>
             </a:r>
             <a:r>
               <a:rPr sz="1350" b="1" i="0">
@@ -9320,7 +9321,7 @@
                 </a:solidFill>
                 <a:latin typeface="Microsoft YaHei"/>
               </a:rPr>
-              <a:t>● </a:t>
+              <a:t xml:space="preserve">● </a:t>
             </a:r>
             <a:r>
               <a:rPr sz="1350" b="1" i="0">
@@ -9532,7 +9533,7 @@
                 </a:solidFill>
                 <a:latin typeface="Microsoft YaHei"/>
               </a:rPr>
-              <a:t>● </a:t>
+              <a:t xml:space="preserve">● </a:t>
             </a:r>
             <a:r>
               <a:rPr sz="1350" b="1" i="0">
@@ -9615,7 +9616,7 @@
                 </a:solidFill>
                 <a:latin typeface="Microsoft YaHei"/>
               </a:rPr>
-              <a:t>● </a:t>
+              <a:t xml:space="preserve">● </a:t>
             </a:r>
             <a:r>
               <a:rPr sz="1350" b="1" i="0">
@@ -9698,7 +9699,7 @@
                 </a:solidFill>
                 <a:latin typeface="Microsoft YaHei"/>
               </a:rPr>
-              <a:t>● </a:t>
+              <a:t xml:space="preserve">● </a:t>
             </a:r>
             <a:r>
               <a:rPr sz="1350" b="1" i="0">
@@ -11445,7 +11446,7 @@
                           </a:solidFill>
                           <a:latin typeface="Microsoft YaHei"/>
                         </a:rPr>
-                        <a:t>—</a:t>
+                        <a:t>9,179</a:t>
                       </a:r>
                     </a:p>
                   </a:txBody>
@@ -11567,7 +11568,7 @@
                           </a:solidFill>
                           <a:latin typeface="Microsoft YaHei"/>
                         </a:rPr>
-                        <a:t>—</a:t>
+                        <a:t>18,085</a:t>
                       </a:r>
                     </a:p>
                   </a:txBody>
@@ -16612,6 +16613,1994 @@
 </p:sld>
 </file>
 
+<file path=ppt/slides/slide19.xml><?xml version="1.0" encoding="utf-8"?>
+<p:sld xmlns:a="http://schemas.openxmlformats.org/drawingml/2006/main" xmlns:r="http://schemas.openxmlformats.org/officeDocument/2006/relationships" xmlns:p="http://schemas.openxmlformats.org/presentationml/2006/main">
+  <p:cSld>
+    <p:spTree>
+      <p:nvGrpSpPr>
+        <p:cNvPr id="1" name=""/>
+        <p:cNvGrpSpPr/>
+        <p:nvPr/>
+      </p:nvGrpSpPr>
+      <p:grpSpPr>
+        <a:xfrm>
+          <a:off x="0" y="0"/>
+          <a:ext cx="0" cy="0"/>
+          <a:chOff x="0" y="0"/>
+          <a:chExt cx="0" cy="0"/>
+        </a:xfrm>
+      </p:grpSpPr>
+      <p:sp>
+        <p:nvSpPr>
+          <p:cNvPr id="2" name="Rectangle 1"/>
+          <p:cNvSpPr/>
+          <p:nvPr/>
+        </p:nvSpPr>
+        <p:spPr>
+          <a:xfrm>
+            <a:off x="0" y="0"/>
+            <a:ext cx="12191695" cy="6858000"/>
+          </a:xfrm>
+          <a:prstGeom prst="rect">
+            <a:avLst/>
+          </a:prstGeom>
+          <a:solidFill>
+            <a:srgbClr val="FFFFFF"/>
+          </a:solidFill>
+          <a:ln>
+            <a:noFill/>
+          </a:ln>
+          <a:effectLst/>
+        </p:spPr>
+        <p:style>
+          <a:lnRef idx="1">
+            <a:schemeClr val="accent1"/>
+          </a:lnRef>
+          <a:fillRef idx="3">
+            <a:schemeClr val="accent1"/>
+          </a:fillRef>
+          <a:effectRef idx="2">
+            <a:schemeClr val="accent1"/>
+          </a:effectRef>
+          <a:fontRef idx="minor">
+            <a:schemeClr val="lt1"/>
+          </a:fontRef>
+        </p:style>
+        <p:txBody>
+          <a:bodyPr rtlCol="0" anchor="ctr"/>
+          <a:lstStyle/>
+          <a:p>
+            <a:pPr algn="ctr"/>
+            <a:endParaRPr/>
+          </a:p>
+        </p:txBody>
+      </p:sp>
+      <p:sp>
+        <p:nvSpPr>
+          <p:cNvPr id="3" name="Rectangle 2"/>
+          <p:cNvSpPr/>
+          <p:nvPr/>
+        </p:nvSpPr>
+        <p:spPr>
+          <a:xfrm>
+            <a:off x="0" y="0"/>
+            <a:ext cx="164592" cy="1143000"/>
+          </a:xfrm>
+          <a:prstGeom prst="rect">
+            <a:avLst/>
+          </a:prstGeom>
+          <a:solidFill>
+            <a:srgbClr val="2E6FB5"/>
+          </a:solidFill>
+          <a:ln>
+            <a:noFill/>
+          </a:ln>
+          <a:effectLst/>
+        </p:spPr>
+        <p:style>
+          <a:lnRef idx="1">
+            <a:schemeClr val="accent1"/>
+          </a:lnRef>
+          <a:fillRef idx="3">
+            <a:schemeClr val="accent1"/>
+          </a:fillRef>
+          <a:effectRef idx="2">
+            <a:schemeClr val="accent1"/>
+          </a:effectRef>
+          <a:fontRef idx="minor">
+            <a:schemeClr val="lt1"/>
+          </a:fontRef>
+        </p:style>
+        <p:txBody>
+          <a:bodyPr rtlCol="0" anchor="ctr"/>
+          <a:lstStyle/>
+          <a:p>
+            <a:pPr algn="ctr"/>
+            <a:endParaRPr/>
+          </a:p>
+        </p:txBody>
+      </p:sp>
+      <p:sp>
+        <p:nvSpPr>
+          <p:cNvPr id="4" name="TextBox 3"/>
+          <p:cNvSpPr txBox="1"/>
+          <p:nvPr/>
+        </p:nvSpPr>
+        <p:spPr>
+          <a:xfrm>
+            <a:off x="502920" y="274320"/>
+            <a:ext cx="10789920" cy="292608"/>
+          </a:xfrm>
+          <a:prstGeom prst="rect">
+            <a:avLst/>
+          </a:prstGeom>
+          <a:noFill/>
+        </p:spPr>
+        <p:txBody>
+          <a:bodyPr wrap="square" lIns="0" tIns="0" rIns="0" bIns="0" anchor="t">
+            <a:spAutoFit/>
+          </a:bodyPr>
+          <a:lstStyle/>
+          <a:p>
+            <a:pPr algn="l"/>
+            <a:r>
+              <a:rPr sz="1200" b="1" i="0">
+                <a:solidFill>
+                  <a:srgbClr val="2E6FB5"/>
+                </a:solidFill>
+                <a:latin typeface="Microsoft YaHei"/>
+              </a:rPr>
+              <a:t>APPENDIX</a:t>
+            </a:r>
+          </a:p>
+        </p:txBody>
+      </p:sp>
+      <p:sp>
+        <p:nvSpPr>
+          <p:cNvPr id="5" name="TextBox 4"/>
+          <p:cNvSpPr txBox="1"/>
+          <p:nvPr/>
+        </p:nvSpPr>
+        <p:spPr>
+          <a:xfrm>
+            <a:off x="502920" y="548640"/>
+            <a:ext cx="11155680" cy="566928"/>
+          </a:xfrm>
+          <a:prstGeom prst="rect">
+            <a:avLst/>
+          </a:prstGeom>
+          <a:noFill/>
+        </p:spPr>
+        <p:txBody>
+          <a:bodyPr wrap="square" lIns="0" tIns="0" rIns="0" bIns="0" anchor="t">
+            <a:spAutoFit/>
+          </a:bodyPr>
+          <a:lstStyle/>
+          <a:p>
+            <a:pPr algn="l"/>
+            <a:r>
+              <a:rPr sz="2800" b="1" i="0">
+                <a:solidFill>
+                  <a:srgbClr val="21295C"/>
+                </a:solidFill>
+                <a:latin typeface="Microsoft YaHei"/>
+              </a:rPr>
+              <a:t>附录 D · rocketmq-customer 主从跨AZ（客户环境）</a:t>
+            </a:r>
+          </a:p>
+        </p:txBody>
+      </p:sp>
+      <p:sp>
+        <p:nvSpPr>
+          <p:cNvPr id="6" name="Rectangle 5"/>
+          <p:cNvSpPr/>
+          <p:nvPr/>
+        </p:nvSpPr>
+        <p:spPr>
+          <a:xfrm>
+            <a:off x="502920" y="1170432"/>
+            <a:ext cx="11155680" cy="17780"/>
+          </a:xfrm>
+          <a:prstGeom prst="rect">
+            <a:avLst/>
+          </a:prstGeom>
+          <a:solidFill>
+            <a:srgbClr val="ECF1F5"/>
+          </a:solidFill>
+          <a:ln>
+            <a:noFill/>
+          </a:ln>
+          <a:effectLst/>
+        </p:spPr>
+        <p:style>
+          <a:lnRef idx="1">
+            <a:schemeClr val="accent1"/>
+          </a:lnRef>
+          <a:fillRef idx="3">
+            <a:schemeClr val="accent1"/>
+          </a:fillRef>
+          <a:effectRef idx="2">
+            <a:schemeClr val="accent1"/>
+          </a:effectRef>
+          <a:fontRef idx="minor">
+            <a:schemeClr val="lt1"/>
+          </a:fontRef>
+        </p:style>
+        <p:txBody>
+          <a:bodyPr rtlCol="0" anchor="ctr"/>
+          <a:lstStyle/>
+          <a:p>
+            <a:pPr algn="ctr"/>
+            <a:endParaRPr/>
+          </a:p>
+        </p:txBody>
+      </p:sp>
+      <p:sp>
+        <p:nvSpPr>
+          <p:cNvPr id="7" name="TextBox 6"/>
+          <p:cNvSpPr txBox="1"/>
+          <p:nvPr/>
+        </p:nvSpPr>
+        <p:spPr>
+          <a:xfrm>
+            <a:off x="502920" y="1325880"/>
+            <a:ext cx="5486400" cy="274320"/>
+          </a:xfrm>
+          <a:prstGeom prst="rect">
+            <a:avLst/>
+          </a:prstGeom>
+          <a:noFill/>
+        </p:spPr>
+        <p:txBody>
+          <a:bodyPr wrap="square" lIns="0" tIns="0" rIns="0" bIns="0" anchor="t">
+            <a:spAutoFit/>
+          </a:bodyPr>
+          <a:lstStyle/>
+          <a:p>
+            <a:pPr algn="l"/>
+            <a:r>
+              <a:rPr sz="1300" b="1" i="0">
+                <a:solidFill>
+                  <a:srgbClr val="2E6FB5"/>
+                </a:solidFill>
+                <a:latin typeface="Microsoft YaHei"/>
+              </a:rPr>
+              <a:t>环境与性能</a:t>
+            </a:r>
+          </a:p>
+        </p:txBody>
+      </p:sp>
+      <p:graphicFrame>
+        <p:nvGraphicFramePr>
+          <p:cNvPr id="8" name="Table 7"/>
+          <p:cNvGraphicFramePr>
+            <a:graphicFrameLocks noGrp="1"/>
+          </p:cNvGraphicFramePr>
+          <p:nvPr/>
+        </p:nvGraphicFramePr>
+        <p:xfrm>
+          <a:off x="502920" y="1645920"/>
+          <a:ext cx="5532120" cy="1554480"/>
+        </p:xfrm>
+        <a:graphic>
+          <a:graphicData uri="http://schemas.openxmlformats.org/drawingml/2006/table">
+            <a:tbl>
+              <a:tblPr firstRow="1" bandRow="1">
+                <a:tableStyleId>{5C22544A-7EE6-4342-B048-85BDC9FD1C3A}</a:tableStyleId>
+              </a:tblPr>
+              <a:tblGrid>
+                <a:gridCol w="1828800">
+                  <a:extLst>
+                    <a:ext uri="{9D8B030D-6E8A-4147-A177-3AD203B41FA5}">
+                      <a16:colId xmlns:a16="http://schemas.microsoft.com/office/drawing/2014/main" val="20000"/>
+                    </a:ext>
+                  </a:extLst>
+                </a:gridCol>
+                <a:gridCol w="3703320">
+                  <a:extLst>
+                    <a:ext uri="{9D8B030D-6E8A-4147-A177-3AD203B41FA5}">
+                      <a16:colId xmlns:a16="http://schemas.microsoft.com/office/drawing/2014/main" val="20001"/>
+                    </a:ext>
+                  </a:extLst>
+                </a:gridCol>
+              </a:tblGrid>
+              <a:tr h="310896">
+                <a:tc>
+                  <a:txBody>
+                    <a:bodyPr/>
+                    <a:lstStyle/>
+                    <a:p>
+                      <a:pPr algn="l"/>
+                      <a:r>
+                        <a:rPr sz="1050" b="1">
+                          <a:solidFill>
+                            <a:srgbClr val="FFFFFF"/>
+                          </a:solidFill>
+                          <a:latin typeface="Microsoft YaHei"/>
+                        </a:rPr>
+                        <a:t>环境项</a:t>
+                      </a:r>
+                    </a:p>
+                  </a:txBody>
+                  <a:tcPr marL="54864" marR="54864" marT="18288" marB="18288" anchor="ctr">
+                    <a:solidFill>
+                      <a:srgbClr val="2E6FB5"/>
+                    </a:solidFill>
+                  </a:tcPr>
+                </a:tc>
+                <a:tc>
+                  <a:txBody>
+                    <a:bodyPr/>
+                    <a:lstStyle/>
+                    <a:p>
+                      <a:pPr algn="ctr"/>
+                      <a:r>
+                        <a:rPr sz="1050" b="1">
+                          <a:solidFill>
+                            <a:srgbClr val="FFFFFF"/>
+                          </a:solidFill>
+                          <a:latin typeface="Microsoft YaHei"/>
+                        </a:rPr>
+                        <a:t>值</a:t>
+                      </a:r>
+                    </a:p>
+                  </a:txBody>
+                  <a:tcPr marL="54864" marR="54864" marT="18288" marB="18288" anchor="ctr">
+                    <a:solidFill>
+                      <a:srgbClr val="2E6FB5"/>
+                    </a:solidFill>
+                  </a:tcPr>
+                </a:tc>
+                <a:extLst>
+                  <a:ext uri="{0D108BD9-81ED-4DB2-BD59-A6C34878D82A}">
+                    <a16:rowId xmlns:a16="http://schemas.microsoft.com/office/drawing/2014/main" val="10000"/>
+                  </a:ext>
+                </a:extLst>
+              </a:tr>
+              <a:tr h="310896">
+                <a:tc>
+                  <a:txBody>
+                    <a:bodyPr/>
+                    <a:lstStyle/>
+                    <a:p>
+                      <a:pPr algn="l"/>
+                      <a:r>
+                        <a:rPr sz="1050" b="1">
+                          <a:solidFill>
+                            <a:srgbClr val="1E293B"/>
+                          </a:solidFill>
+                          <a:latin typeface="Microsoft YaHei"/>
+                        </a:rPr>
+                        <a:t>拓扑</a:t>
+                      </a:r>
+                    </a:p>
+                  </a:txBody>
+                  <a:tcPr marL="54864" marR="54864" marT="18288" marB="18288" anchor="ctr">
+                    <a:solidFill>
+                      <a:srgbClr val="FFFFFF"/>
+                    </a:solidFill>
+                  </a:tcPr>
+                </a:tc>
+                <a:tc>
+                  <a:txBody>
+                    <a:bodyPr/>
+                    <a:lstStyle/>
+                    <a:p>
+                      <a:pPr algn="ctr"/>
+                      <a:r>
+                        <a:rPr sz="1050" b="0">
+                          <a:solidFill>
+                            <a:srgbClr val="1E293B"/>
+                          </a:solidFill>
+                          <a:latin typeface="Microsoft YaHei"/>
+                        </a:rPr>
+                        <a:t>3组×(1主1从)=6，主z1/从z2跨AZ</a:t>
+                      </a:r>
+                    </a:p>
+                  </a:txBody>
+                  <a:tcPr marL="54864" marR="54864" marT="18288" marB="18288" anchor="ctr">
+                    <a:solidFill>
+                      <a:srgbClr val="FFFFFF"/>
+                    </a:solidFill>
+                  </a:tcPr>
+                </a:tc>
+                <a:extLst>
+                  <a:ext uri="{0D108BD9-81ED-4DB2-BD59-A6C34878D82A}">
+                    <a16:rowId xmlns:a16="http://schemas.microsoft.com/office/drawing/2014/main" val="10001"/>
+                  </a:ext>
+                </a:extLst>
+              </a:tr>
+              <a:tr h="310896">
+                <a:tc>
+                  <a:txBody>
+                    <a:bodyPr/>
+                    <a:lstStyle/>
+                    <a:p>
+                      <a:pPr algn="l"/>
+                      <a:r>
+                        <a:rPr sz="1050" b="1">
+                          <a:solidFill>
+                            <a:srgbClr val="1E293B"/>
+                          </a:solidFill>
+                          <a:latin typeface="Microsoft YaHei"/>
+                        </a:rPr>
+                        <a:t>复制/刷盘</a:t>
+                      </a:r>
+                    </a:p>
+                  </a:txBody>
+                  <a:tcPr marL="54864" marR="54864" marT="18288" marB="18288" anchor="ctr">
+                    <a:solidFill>
+                      <a:srgbClr val="ECF1F5"/>
+                    </a:solidFill>
+                  </a:tcPr>
+                </a:tc>
+                <a:tc>
+                  <a:txBody>
+                    <a:bodyPr/>
+                    <a:lstStyle/>
+                    <a:p>
+                      <a:pPr algn="ctr"/>
+                      <a:r>
+                        <a:rPr sz="1050" b="0">
+                          <a:solidFill>
+                            <a:srgbClr val="1E293B"/>
+                          </a:solidFill>
+                          <a:latin typeface="Microsoft YaHei"/>
+                        </a:rPr>
+                        <a:t>SYNC_MASTER + ASYNC_FLUSH</a:t>
+                      </a:r>
+                    </a:p>
+                  </a:txBody>
+                  <a:tcPr marL="54864" marR="54864" marT="18288" marB="18288" anchor="ctr">
+                    <a:solidFill>
+                      <a:srgbClr val="ECF1F5"/>
+                    </a:solidFill>
+                  </a:tcPr>
+                </a:tc>
+                <a:extLst>
+                  <a:ext uri="{0D108BD9-81ED-4DB2-BD59-A6C34878D82A}">
+                    <a16:rowId xmlns:a16="http://schemas.microsoft.com/office/drawing/2014/main" val="10002"/>
+                  </a:ext>
+                </a:extLst>
+              </a:tr>
+              <a:tr h="310896">
+                <a:tc>
+                  <a:txBody>
+                    <a:bodyPr/>
+                    <a:lstStyle/>
+                    <a:p>
+                      <a:pPr algn="l"/>
+                      <a:r>
+                        <a:rPr sz="1050" b="1">
+                          <a:solidFill>
+                            <a:srgbClr val="1E293B"/>
+                          </a:solidFill>
+                          <a:latin typeface="Microsoft YaHei"/>
+                        </a:rPr>
+                        <a:t>机型/堆</a:t>
+                      </a:r>
+                    </a:p>
+                  </a:txBody>
+                  <a:tcPr marL="54864" marR="54864" marT="18288" marB="18288" anchor="ctr">
+                    <a:solidFill>
+                      <a:srgbClr val="FFFFFF"/>
+                    </a:solidFill>
+                  </a:tcPr>
+                </a:tc>
+                <a:tc>
+                  <a:txBody>
+                    <a:bodyPr/>
+                    <a:lstStyle/>
+                    <a:p>
+                      <a:pPr algn="ctr"/>
+                      <a:r>
+                        <a:rPr sz="1050" b="0">
+                          <a:solidFill>
+                            <a:srgbClr val="1E293B"/>
+                          </a:solidFill>
+                          <a:latin typeface="Microsoft YaHei"/>
+                        </a:rPr>
+                        <a:t>Rocky9 JDK11 / -Xmx8g</a:t>
+                      </a:r>
+                    </a:p>
+                  </a:txBody>
+                  <a:tcPr marL="54864" marR="54864" marT="18288" marB="18288" anchor="ctr">
+                    <a:solidFill>
+                      <a:srgbClr val="FFFFFF"/>
+                    </a:solidFill>
+                  </a:tcPr>
+                </a:tc>
+                <a:extLst>
+                  <a:ext uri="{0D108BD9-81ED-4DB2-BD59-A6C34878D82A}">
+                    <a16:rowId xmlns:a16="http://schemas.microsoft.com/office/drawing/2014/main" val="10003"/>
+                  </a:ext>
+                </a:extLst>
+              </a:tr>
+              <a:tr h="310896">
+                <a:tc>
+                  <a:txBody>
+                    <a:bodyPr/>
+                    <a:lstStyle/>
+                    <a:p>
+                      <a:pPr algn="l"/>
+                      <a:r>
+                        <a:rPr sz="1050" b="1">
+                          <a:solidFill>
+                            <a:srgbClr val="1E293B"/>
+                          </a:solidFill>
+                          <a:latin typeface="Microsoft YaHei"/>
+                        </a:rPr>
+                        <a:t>健康检查</a:t>
+                      </a:r>
+                    </a:p>
+                  </a:txBody>
+                  <a:tcPr marL="54864" marR="54864" marT="18288" marB="18288" anchor="ctr">
+                    <a:solidFill>
+                      <a:srgbClr val="ECF1F5"/>
+                    </a:solidFill>
+                  </a:tcPr>
+                </a:tc>
+                <a:tc>
+                  <a:txBody>
+                    <a:bodyPr/>
+                    <a:lstStyle/>
+                    <a:p>
+                      <a:pPr algn="ctr"/>
+                      <a:r>
+                        <a:rPr sz="1050" b="0">
+                          <a:solidFill>
+                            <a:srgbClr val="1E293B"/>
+                          </a:solidFill>
+                          <a:latin typeface="Microsoft YaHei"/>
+                        </a:rPr>
+                        <a:t>6/6（基线）</a:t>
+                      </a:r>
+                    </a:p>
+                  </a:txBody>
+                  <a:tcPr marL="54864" marR="54864" marT="18288" marB="18288" anchor="ctr">
+                    <a:solidFill>
+                      <a:srgbClr val="ECF1F5"/>
+                    </a:solidFill>
+                  </a:tcPr>
+                </a:tc>
+                <a:extLst>
+                  <a:ext uri="{0D108BD9-81ED-4DB2-BD59-A6C34878D82A}">
+                    <a16:rowId xmlns:a16="http://schemas.microsoft.com/office/drawing/2014/main" val="10004"/>
+                  </a:ext>
+                </a:extLst>
+              </a:tr>
+            </a:tbl>
+          </a:graphicData>
+        </a:graphic>
+      </p:graphicFrame>
+      <p:graphicFrame>
+        <p:nvGraphicFramePr>
+          <p:cNvPr id="9" name="Table 8"/>
+          <p:cNvGraphicFramePr>
+            <a:graphicFrameLocks noGrp="1"/>
+          </p:cNvGraphicFramePr>
+          <p:nvPr/>
+        </p:nvGraphicFramePr>
+        <p:xfrm>
+          <a:off x="502920" y="3611880"/>
+          <a:ext cx="5532120" cy="1554480"/>
+        </p:xfrm>
+        <a:graphic>
+          <a:graphicData uri="http://schemas.openxmlformats.org/drawingml/2006/table">
+            <a:tbl>
+              <a:tblPr firstRow="1" bandRow="1">
+                <a:tableStyleId>{5C22544A-7EE6-4342-B048-85BDC9FD1C3A}</a:tableStyleId>
+              </a:tblPr>
+              <a:tblGrid>
+                <a:gridCol w="1371600">
+                  <a:extLst>
+                    <a:ext uri="{9D8B030D-6E8A-4147-A177-3AD203B41FA5}">
+                      <a16:colId xmlns:a16="http://schemas.microsoft.com/office/drawing/2014/main" val="20000"/>
+                    </a:ext>
+                  </a:extLst>
+                </a:gridCol>
+                <a:gridCol w="1188720">
+                  <a:extLst>
+                    <a:ext uri="{9D8B030D-6E8A-4147-A177-3AD203B41FA5}">
+                      <a16:colId xmlns:a16="http://schemas.microsoft.com/office/drawing/2014/main" val="20001"/>
+                    </a:ext>
+                  </a:extLst>
+                </a:gridCol>
+                <a:gridCol w="1188720">
+                  <a:extLst>
+                    <a:ext uri="{9D8B030D-6E8A-4147-A177-3AD203B41FA5}">
+                      <a16:colId xmlns:a16="http://schemas.microsoft.com/office/drawing/2014/main" val="20002"/>
+                    </a:ext>
+                  </a:extLst>
+                </a:gridCol>
+                <a:gridCol w="868680">
+                  <a:extLst>
+                    <a:ext uri="{9D8B030D-6E8A-4147-A177-3AD203B41FA5}">
+                      <a16:colId xmlns:a16="http://schemas.microsoft.com/office/drawing/2014/main" val="20003"/>
+                    </a:ext>
+                  </a:extLst>
+                </a:gridCol>
+                <a:gridCol w="914400">
+                  <a:extLst>
+                    <a:ext uri="{9D8B030D-6E8A-4147-A177-3AD203B41FA5}">
+                      <a16:colId xmlns:a16="http://schemas.microsoft.com/office/drawing/2014/main" val="20004"/>
+                    </a:ext>
+                  </a:extLst>
+                </a:gridCol>
+              </a:tblGrid>
+              <a:tr h="310896">
+                <a:tc>
+                  <a:txBody>
+                    <a:bodyPr/>
+                    <a:lstStyle/>
+                    <a:p>
+                      <a:pPr algn="l"/>
+                      <a:r>
+                        <a:rPr sz="1050" b="1">
+                          <a:solidFill>
+                            <a:srgbClr val="FFFFFF"/>
+                          </a:solidFill>
+                          <a:latin typeface="Microsoft YaHei"/>
+                        </a:rPr>
+                        <a:t>线程</a:t>
+                      </a:r>
+                    </a:p>
+                  </a:txBody>
+                  <a:tcPr marL="54864" marR="54864" marT="18288" marB="18288" anchor="ctr">
+                    <a:solidFill>
+                      <a:srgbClr val="21295C"/>
+                    </a:solidFill>
+                  </a:tcPr>
+                </a:tc>
+                <a:tc>
+                  <a:txBody>
+                    <a:bodyPr/>
+                    <a:lstStyle/>
+                    <a:p>
+                      <a:pPr algn="ctr"/>
+                      <a:r>
+                        <a:rPr sz="1050" b="1">
+                          <a:solidFill>
+                            <a:srgbClr val="FFFFFF"/>
+                          </a:solidFill>
+                          <a:latin typeface="Microsoft YaHei"/>
+                        </a:rPr>
+                        <a:t>平均TPS</a:t>
+                      </a:r>
+                    </a:p>
+                  </a:txBody>
+                  <a:tcPr marL="54864" marR="54864" marT="18288" marB="18288" anchor="ctr">
+                    <a:solidFill>
+                      <a:srgbClr val="21295C"/>
+                    </a:solidFill>
+                  </a:tcPr>
+                </a:tc>
+                <a:tc>
+                  <a:txBody>
+                    <a:bodyPr/>
+                    <a:lstStyle/>
+                    <a:p>
+                      <a:pPr algn="ctr"/>
+                      <a:r>
+                        <a:rPr sz="1050" b="1">
+                          <a:solidFill>
+                            <a:srgbClr val="FFFFFF"/>
+                          </a:solidFill>
+                          <a:latin typeface="Microsoft YaHei"/>
+                        </a:rPr>
+                        <a:t>最大TPS</a:t>
+                      </a:r>
+                    </a:p>
+                  </a:txBody>
+                  <a:tcPr marL="54864" marR="54864" marT="18288" marB="18288" anchor="ctr">
+                    <a:solidFill>
+                      <a:srgbClr val="21295C"/>
+                    </a:solidFill>
+                  </a:tcPr>
+                </a:tc>
+                <a:tc>
+                  <a:txBody>
+                    <a:bodyPr/>
+                    <a:lstStyle/>
+                    <a:p>
+                      <a:pPr algn="ctr"/>
+                      <a:r>
+                        <a:rPr sz="1050" b="1">
+                          <a:solidFill>
+                            <a:srgbClr val="FFFFFF"/>
+                          </a:solidFill>
+                          <a:latin typeface="Microsoft YaHei"/>
+                        </a:rPr>
+                        <a:t>RT(ms)</a:t>
+                      </a:r>
+                    </a:p>
+                  </a:txBody>
+                  <a:tcPr marL="54864" marR="54864" marT="18288" marB="18288" anchor="ctr">
+                    <a:solidFill>
+                      <a:srgbClr val="21295C"/>
+                    </a:solidFill>
+                  </a:tcPr>
+                </a:tc>
+                <a:tc>
+                  <a:txBody>
+                    <a:bodyPr/>
+                    <a:lstStyle/>
+                    <a:p>
+                      <a:pPr algn="ctr"/>
+                      <a:r>
+                        <a:rPr sz="1050" b="1">
+                          <a:solidFill>
+                            <a:srgbClr val="FFFFFF"/>
+                          </a:solidFill>
+                          <a:latin typeface="Microsoft YaHei"/>
+                        </a:rPr>
+                        <a:t>失败</a:t>
+                      </a:r>
+                    </a:p>
+                  </a:txBody>
+                  <a:tcPr marL="54864" marR="54864" marT="18288" marB="18288" anchor="ctr">
+                    <a:solidFill>
+                      <a:srgbClr val="21295C"/>
+                    </a:solidFill>
+                  </a:tcPr>
+                </a:tc>
+                <a:extLst>
+                  <a:ext uri="{0D108BD9-81ED-4DB2-BD59-A6C34878D82A}">
+                    <a16:rowId xmlns:a16="http://schemas.microsoft.com/office/drawing/2014/main" val="10000"/>
+                  </a:ext>
+                </a:extLst>
+              </a:tr>
+              <a:tr h="310896">
+                <a:tc>
+                  <a:txBody>
+                    <a:bodyPr/>
+                    <a:lstStyle/>
+                    <a:p>
+                      <a:pPr algn="l"/>
+                      <a:r>
+                        <a:rPr sz="1050" b="1">
+                          <a:solidFill>
+                            <a:srgbClr val="1E293B"/>
+                          </a:solidFill>
+                          <a:latin typeface="Microsoft YaHei"/>
+                        </a:rPr>
+                        <a:t>16</a:t>
+                      </a:r>
+                    </a:p>
+                  </a:txBody>
+                  <a:tcPr marL="54864" marR="54864" marT="18288" marB="18288" anchor="ctr">
+                    <a:solidFill>
+                      <a:srgbClr val="FFFFFF"/>
+                    </a:solidFill>
+                  </a:tcPr>
+                </a:tc>
+                <a:tc>
+                  <a:txBody>
+                    <a:bodyPr/>
+                    <a:lstStyle/>
+                    <a:p>
+                      <a:pPr algn="ctr"/>
+                      <a:r>
+                        <a:rPr sz="1050" b="0">
+                          <a:solidFill>
+                            <a:srgbClr val="1E293B"/>
+                          </a:solidFill>
+                          <a:latin typeface="Microsoft YaHei"/>
+                        </a:rPr>
+                        <a:t>19,922</a:t>
+                      </a:r>
+                    </a:p>
+                  </a:txBody>
+                  <a:tcPr marL="54864" marR="54864" marT="18288" marB="18288" anchor="ctr">
+                    <a:solidFill>
+                      <a:srgbClr val="FFFFFF"/>
+                    </a:solidFill>
+                  </a:tcPr>
+                </a:tc>
+                <a:tc>
+                  <a:txBody>
+                    <a:bodyPr/>
+                    <a:lstStyle/>
+                    <a:p>
+                      <a:pPr algn="ctr"/>
+                      <a:r>
+                        <a:rPr sz="1050" b="0">
+                          <a:solidFill>
+                            <a:srgbClr val="1E293B"/>
+                          </a:solidFill>
+                          <a:latin typeface="Microsoft YaHei"/>
+                        </a:rPr>
+                        <a:t>20,229</a:t>
+                      </a:r>
+                    </a:p>
+                  </a:txBody>
+                  <a:tcPr marL="54864" marR="54864" marT="18288" marB="18288" anchor="ctr">
+                    <a:solidFill>
+                      <a:srgbClr val="FFFFFF"/>
+                    </a:solidFill>
+                  </a:tcPr>
+                </a:tc>
+                <a:tc>
+                  <a:txBody>
+                    <a:bodyPr/>
+                    <a:lstStyle/>
+                    <a:p>
+                      <a:pPr algn="ctr"/>
+                      <a:r>
+                        <a:rPr sz="1050" b="0">
+                          <a:solidFill>
+                            <a:srgbClr val="1E293B"/>
+                          </a:solidFill>
+                          <a:latin typeface="Microsoft YaHei"/>
+                        </a:rPr>
+                        <a:t>0.803</a:t>
+                      </a:r>
+                    </a:p>
+                  </a:txBody>
+                  <a:tcPr marL="54864" marR="54864" marT="18288" marB="18288" anchor="ctr">
+                    <a:solidFill>
+                      <a:srgbClr val="FFFFFF"/>
+                    </a:solidFill>
+                  </a:tcPr>
+                </a:tc>
+                <a:tc>
+                  <a:txBody>
+                    <a:bodyPr/>
+                    <a:lstStyle/>
+                    <a:p>
+                      <a:pPr algn="ctr"/>
+                      <a:r>
+                        <a:rPr sz="1050" b="0">
+                          <a:solidFill>
+                            <a:srgbClr val="1E293B"/>
+                          </a:solidFill>
+                          <a:latin typeface="Microsoft YaHei"/>
+                        </a:rPr>
+                        <a:t>0</a:t>
+                      </a:r>
+                    </a:p>
+                  </a:txBody>
+                  <a:tcPr marL="54864" marR="54864" marT="18288" marB="18288" anchor="ctr">
+                    <a:solidFill>
+                      <a:srgbClr val="FFFFFF"/>
+                    </a:solidFill>
+                  </a:tcPr>
+                </a:tc>
+                <a:extLst>
+                  <a:ext uri="{0D108BD9-81ED-4DB2-BD59-A6C34878D82A}">
+                    <a16:rowId xmlns:a16="http://schemas.microsoft.com/office/drawing/2014/main" val="10001"/>
+                  </a:ext>
+                </a:extLst>
+              </a:tr>
+              <a:tr h="310896">
+                <a:tc>
+                  <a:txBody>
+                    <a:bodyPr/>
+                    <a:lstStyle/>
+                    <a:p>
+                      <a:pPr algn="l"/>
+                      <a:r>
+                        <a:rPr sz="1050" b="1">
+                          <a:solidFill>
+                            <a:srgbClr val="1E293B"/>
+                          </a:solidFill>
+                          <a:latin typeface="Microsoft YaHei"/>
+                        </a:rPr>
+                        <a:t>32</a:t>
+                      </a:r>
+                    </a:p>
+                  </a:txBody>
+                  <a:tcPr marL="54864" marR="54864" marT="18288" marB="18288" anchor="ctr">
+                    <a:solidFill>
+                      <a:srgbClr val="ECF1F5"/>
+                    </a:solidFill>
+                  </a:tcPr>
+                </a:tc>
+                <a:tc>
+                  <a:txBody>
+                    <a:bodyPr/>
+                    <a:lstStyle/>
+                    <a:p>
+                      <a:pPr algn="ctr"/>
+                      <a:r>
+                        <a:rPr sz="1050" b="0">
+                          <a:solidFill>
+                            <a:srgbClr val="1E293B"/>
+                          </a:solidFill>
+                          <a:latin typeface="Microsoft YaHei"/>
+                        </a:rPr>
+                        <a:t>37,311</a:t>
+                      </a:r>
+                    </a:p>
+                  </a:txBody>
+                  <a:tcPr marL="54864" marR="54864" marT="18288" marB="18288" anchor="ctr">
+                    <a:solidFill>
+                      <a:srgbClr val="ECF1F5"/>
+                    </a:solidFill>
+                  </a:tcPr>
+                </a:tc>
+                <a:tc>
+                  <a:txBody>
+                    <a:bodyPr/>
+                    <a:lstStyle/>
+                    <a:p>
+                      <a:pPr algn="ctr"/>
+                      <a:r>
+                        <a:rPr sz="1050" b="0">
+                          <a:solidFill>
+                            <a:srgbClr val="1E293B"/>
+                          </a:solidFill>
+                          <a:latin typeface="Microsoft YaHei"/>
+                        </a:rPr>
+                        <a:t>38,077</a:t>
+                      </a:r>
+                    </a:p>
+                  </a:txBody>
+                  <a:tcPr marL="54864" marR="54864" marT="18288" marB="18288" anchor="ctr">
+                    <a:solidFill>
+                      <a:srgbClr val="ECF1F5"/>
+                    </a:solidFill>
+                  </a:tcPr>
+                </a:tc>
+                <a:tc>
+                  <a:txBody>
+                    <a:bodyPr/>
+                    <a:lstStyle/>
+                    <a:p>
+                      <a:pPr algn="ctr"/>
+                      <a:r>
+                        <a:rPr sz="1050" b="0">
+                          <a:solidFill>
+                            <a:srgbClr val="1E293B"/>
+                          </a:solidFill>
+                          <a:latin typeface="Microsoft YaHei"/>
+                        </a:rPr>
+                        <a:t>0.858</a:t>
+                      </a:r>
+                    </a:p>
+                  </a:txBody>
+                  <a:tcPr marL="54864" marR="54864" marT="18288" marB="18288" anchor="ctr">
+                    <a:solidFill>
+                      <a:srgbClr val="ECF1F5"/>
+                    </a:solidFill>
+                  </a:tcPr>
+                </a:tc>
+                <a:tc>
+                  <a:txBody>
+                    <a:bodyPr/>
+                    <a:lstStyle/>
+                    <a:p>
+                      <a:pPr algn="ctr"/>
+                      <a:r>
+                        <a:rPr sz="1050" b="0">
+                          <a:solidFill>
+                            <a:srgbClr val="1E293B"/>
+                          </a:solidFill>
+                          <a:latin typeface="Microsoft YaHei"/>
+                        </a:rPr>
+                        <a:t>0</a:t>
+                      </a:r>
+                    </a:p>
+                  </a:txBody>
+                  <a:tcPr marL="54864" marR="54864" marT="18288" marB="18288" anchor="ctr">
+                    <a:solidFill>
+                      <a:srgbClr val="ECF1F5"/>
+                    </a:solidFill>
+                  </a:tcPr>
+                </a:tc>
+                <a:extLst>
+                  <a:ext uri="{0D108BD9-81ED-4DB2-BD59-A6C34878D82A}">
+                    <a16:rowId xmlns:a16="http://schemas.microsoft.com/office/drawing/2014/main" val="10002"/>
+                  </a:ext>
+                </a:extLst>
+              </a:tr>
+              <a:tr h="310896">
+                <a:tc>
+                  <a:txBody>
+                    <a:bodyPr/>
+                    <a:lstStyle/>
+                    <a:p>
+                      <a:pPr algn="l"/>
+                      <a:r>
+                        <a:rPr sz="1050" b="1">
+                          <a:solidFill>
+                            <a:srgbClr val="1E293B"/>
+                          </a:solidFill>
+                          <a:latin typeface="Microsoft YaHei"/>
+                        </a:rPr>
+                        <a:t>64</a:t>
+                      </a:r>
+                    </a:p>
+                  </a:txBody>
+                  <a:tcPr marL="54864" marR="54864" marT="18288" marB="18288" anchor="ctr">
+                    <a:solidFill>
+                      <a:srgbClr val="FFFFFF"/>
+                    </a:solidFill>
+                  </a:tcPr>
+                </a:tc>
+                <a:tc>
+                  <a:txBody>
+                    <a:bodyPr/>
+                    <a:lstStyle/>
+                    <a:p>
+                      <a:pPr algn="ctr"/>
+                      <a:r>
+                        <a:rPr sz="1050" b="0">
+                          <a:solidFill>
+                            <a:srgbClr val="1E293B"/>
+                          </a:solidFill>
+                          <a:latin typeface="Microsoft YaHei"/>
+                        </a:rPr>
+                        <a:t>65,955</a:t>
+                      </a:r>
+                    </a:p>
+                  </a:txBody>
+                  <a:tcPr marL="54864" marR="54864" marT="18288" marB="18288" anchor="ctr">
+                    <a:solidFill>
+                      <a:srgbClr val="FFFFFF"/>
+                    </a:solidFill>
+                  </a:tcPr>
+                </a:tc>
+                <a:tc>
+                  <a:txBody>
+                    <a:bodyPr/>
+                    <a:lstStyle/>
+                    <a:p>
+                      <a:pPr algn="ctr"/>
+                      <a:r>
+                        <a:rPr sz="1050" b="0">
+                          <a:solidFill>
+                            <a:srgbClr val="1E293B"/>
+                          </a:solidFill>
+                          <a:latin typeface="Microsoft YaHei"/>
+                        </a:rPr>
+                        <a:t>67,338</a:t>
+                      </a:r>
+                    </a:p>
+                  </a:txBody>
+                  <a:tcPr marL="54864" marR="54864" marT="18288" marB="18288" anchor="ctr">
+                    <a:solidFill>
+                      <a:srgbClr val="FFFFFF"/>
+                    </a:solidFill>
+                  </a:tcPr>
+                </a:tc>
+                <a:tc>
+                  <a:txBody>
+                    <a:bodyPr/>
+                    <a:lstStyle/>
+                    <a:p>
+                      <a:pPr algn="ctr"/>
+                      <a:r>
+                        <a:rPr sz="1050" b="0">
+                          <a:solidFill>
+                            <a:srgbClr val="1E293B"/>
+                          </a:solidFill>
+                          <a:latin typeface="Microsoft YaHei"/>
+                        </a:rPr>
+                        <a:t>0.970</a:t>
+                      </a:r>
+                    </a:p>
+                  </a:txBody>
+                  <a:tcPr marL="54864" marR="54864" marT="18288" marB="18288" anchor="ctr">
+                    <a:solidFill>
+                      <a:srgbClr val="FFFFFF"/>
+                    </a:solidFill>
+                  </a:tcPr>
+                </a:tc>
+                <a:tc>
+                  <a:txBody>
+                    <a:bodyPr/>
+                    <a:lstStyle/>
+                    <a:p>
+                      <a:pPr algn="ctr"/>
+                      <a:r>
+                        <a:rPr sz="1050" b="0">
+                          <a:solidFill>
+                            <a:srgbClr val="1E293B"/>
+                          </a:solidFill>
+                          <a:latin typeface="Microsoft YaHei"/>
+                        </a:rPr>
+                        <a:t>0</a:t>
+                      </a:r>
+                    </a:p>
+                  </a:txBody>
+                  <a:tcPr marL="54864" marR="54864" marT="18288" marB="18288" anchor="ctr">
+                    <a:solidFill>
+                      <a:srgbClr val="FFFFFF"/>
+                    </a:solidFill>
+                  </a:tcPr>
+                </a:tc>
+                <a:extLst>
+                  <a:ext uri="{0D108BD9-81ED-4DB2-BD59-A6C34878D82A}">
+                    <a16:rowId xmlns:a16="http://schemas.microsoft.com/office/drawing/2014/main" val="10003"/>
+                  </a:ext>
+                </a:extLst>
+              </a:tr>
+              <a:tr h="310896">
+                <a:tc>
+                  <a:txBody>
+                    <a:bodyPr/>
+                    <a:lstStyle/>
+                    <a:p>
+                      <a:pPr algn="l"/>
+                      <a:r>
+                        <a:rPr sz="1050" b="1">
+                          <a:solidFill>
+                            <a:srgbClr val="1E293B"/>
+                          </a:solidFill>
+                          <a:latin typeface="Microsoft YaHei"/>
+                        </a:rPr>
+                        <a:t>128</a:t>
+                      </a:r>
+                    </a:p>
+                  </a:txBody>
+                  <a:tcPr marL="54864" marR="54864" marT="18288" marB="18288" anchor="ctr">
+                    <a:solidFill>
+                      <a:srgbClr val="ECF1F5"/>
+                    </a:solidFill>
+                  </a:tcPr>
+                </a:tc>
+                <a:tc>
+                  <a:txBody>
+                    <a:bodyPr/>
+                    <a:lstStyle/>
+                    <a:p>
+                      <a:pPr algn="ctr"/>
+                      <a:r>
+                        <a:rPr sz="1050" b="0">
+                          <a:solidFill>
+                            <a:srgbClr val="1E293B"/>
+                          </a:solidFill>
+                          <a:latin typeface="Microsoft YaHei"/>
+                        </a:rPr>
+                        <a:t>101,102</a:t>
+                      </a:r>
+                    </a:p>
+                  </a:txBody>
+                  <a:tcPr marL="54864" marR="54864" marT="18288" marB="18288" anchor="ctr">
+                    <a:solidFill>
+                      <a:srgbClr val="ECF1F5"/>
+                    </a:solidFill>
+                  </a:tcPr>
+                </a:tc>
+                <a:tc>
+                  <a:txBody>
+                    <a:bodyPr/>
+                    <a:lstStyle/>
+                    <a:p>
+                      <a:pPr algn="ctr"/>
+                      <a:r>
+                        <a:rPr sz="1050" b="0">
+                          <a:solidFill>
+                            <a:srgbClr val="1E293B"/>
+                          </a:solidFill>
+                          <a:latin typeface="Microsoft YaHei"/>
+                        </a:rPr>
+                        <a:t>102,518</a:t>
+                      </a:r>
+                    </a:p>
+                  </a:txBody>
+                  <a:tcPr marL="54864" marR="54864" marT="18288" marB="18288" anchor="ctr">
+                    <a:solidFill>
+                      <a:srgbClr val="ECF1F5"/>
+                    </a:solidFill>
+                  </a:tcPr>
+                </a:tc>
+                <a:tc>
+                  <a:txBody>
+                    <a:bodyPr/>
+                    <a:lstStyle/>
+                    <a:p>
+                      <a:pPr algn="ctr"/>
+                      <a:r>
+                        <a:rPr sz="1050" b="0">
+                          <a:solidFill>
+                            <a:srgbClr val="1E293B"/>
+                          </a:solidFill>
+                          <a:latin typeface="Microsoft YaHei"/>
+                        </a:rPr>
+                        <a:t>1.266</a:t>
+                      </a:r>
+                    </a:p>
+                  </a:txBody>
+                  <a:tcPr marL="54864" marR="54864" marT="18288" marB="18288" anchor="ctr">
+                    <a:solidFill>
+                      <a:srgbClr val="ECF1F5"/>
+                    </a:solidFill>
+                  </a:tcPr>
+                </a:tc>
+                <a:tc>
+                  <a:txBody>
+                    <a:bodyPr/>
+                    <a:lstStyle/>
+                    <a:p>
+                      <a:pPr algn="ctr"/>
+                      <a:r>
+                        <a:rPr sz="1050" b="0">
+                          <a:solidFill>
+                            <a:srgbClr val="1E293B"/>
+                          </a:solidFill>
+                          <a:latin typeface="Microsoft YaHei"/>
+                        </a:rPr>
+                        <a:t>0</a:t>
+                      </a:r>
+                    </a:p>
+                  </a:txBody>
+                  <a:tcPr marL="54864" marR="54864" marT="18288" marB="18288" anchor="ctr">
+                    <a:solidFill>
+                      <a:srgbClr val="ECF1F5"/>
+                    </a:solidFill>
+                  </a:tcPr>
+                </a:tc>
+                <a:extLst>
+                  <a:ext uri="{0D108BD9-81ED-4DB2-BD59-A6C34878D82A}">
+                    <a16:rowId xmlns:a16="http://schemas.microsoft.com/office/drawing/2014/main" val="10004"/>
+                  </a:ext>
+                </a:extLst>
+              </a:tr>
+            </a:tbl>
+          </a:graphicData>
+        </a:graphic>
+      </p:graphicFrame>
+      <p:sp>
+        <p:nvSpPr>
+          <p:cNvPr id="10" name="TextBox 9"/>
+          <p:cNvSpPr txBox="1"/>
+          <p:nvPr/>
+        </p:nvSpPr>
+        <p:spPr>
+          <a:xfrm>
+            <a:off x="6263640" y="1325880"/>
+            <a:ext cx="5486400" cy="274320"/>
+          </a:xfrm>
+          <a:prstGeom prst="rect">
+            <a:avLst/>
+          </a:prstGeom>
+          <a:noFill/>
+        </p:spPr>
+        <p:txBody>
+          <a:bodyPr wrap="square" lIns="0" tIns="0" rIns="0" bIns="0" anchor="t">
+            <a:spAutoFit/>
+          </a:bodyPr>
+          <a:lstStyle/>
+          <a:p>
+            <a:pPr algn="l"/>
+            <a:r>
+              <a:rPr sz="1300" b="1" i="0">
+                <a:solidFill>
+                  <a:srgbClr val="2E6FB5"/>
+                </a:solidFill>
+                <a:latin typeface="Microsoft YaHei"/>
+              </a:rPr>
+              <a:t>故障演练 B / C / D</a:t>
+            </a:r>
+          </a:p>
+        </p:txBody>
+      </p:sp>
+      <p:graphicFrame>
+        <p:nvGraphicFramePr>
+          <p:cNvPr id="11" name="Table 10"/>
+          <p:cNvGraphicFramePr>
+            <a:graphicFrameLocks noGrp="1"/>
+          </p:cNvGraphicFramePr>
+          <p:nvPr/>
+        </p:nvGraphicFramePr>
+        <p:xfrm>
+          <a:off x="6263640" y="1645920"/>
+          <a:ext cx="5422392" cy="2194560"/>
+        </p:xfrm>
+        <a:graphic>
+          <a:graphicData uri="http://schemas.openxmlformats.org/drawingml/2006/table">
+            <a:tbl>
+              <a:tblPr firstRow="1" bandRow="1">
+                <a:tableStyleId>{5C22544A-7EE6-4342-B048-85BDC9FD1C3A}</a:tableStyleId>
+              </a:tblPr>
+              <a:tblGrid>
+                <a:gridCol w="1463040">
+                  <a:extLst>
+                    <a:ext uri="{9D8B030D-6E8A-4147-A177-3AD203B41FA5}">
+                      <a16:colId xmlns:a16="http://schemas.microsoft.com/office/drawing/2014/main" val="20000"/>
+                    </a:ext>
+                  </a:extLst>
+                </a:gridCol>
+                <a:gridCol w="1325880">
+                  <a:extLst>
+                    <a:ext uri="{9D8B030D-6E8A-4147-A177-3AD203B41FA5}">
+                      <a16:colId xmlns:a16="http://schemas.microsoft.com/office/drawing/2014/main" val="20001"/>
+                    </a:ext>
+                  </a:extLst>
+                </a:gridCol>
+                <a:gridCol w="1325880">
+                  <a:extLst>
+                    <a:ext uri="{9D8B030D-6E8A-4147-A177-3AD203B41FA5}">
+                      <a16:colId xmlns:a16="http://schemas.microsoft.com/office/drawing/2014/main" val="20002"/>
+                    </a:ext>
+                  </a:extLst>
+                </a:gridCol>
+                <a:gridCol w="1307592">
+                  <a:extLst>
+                    <a:ext uri="{9D8B030D-6E8A-4147-A177-3AD203B41FA5}">
+                      <a16:colId xmlns:a16="http://schemas.microsoft.com/office/drawing/2014/main" val="20003"/>
+                    </a:ext>
+                  </a:extLst>
+                </a:gridCol>
+              </a:tblGrid>
+              <a:tr h="365760">
+                <a:tc>
+                  <a:txBody>
+                    <a:bodyPr/>
+                    <a:lstStyle/>
+                    <a:p>
+                      <a:pPr algn="l"/>
+                      <a:r>
+                        <a:rPr sz="1050" b="1">
+                          <a:solidFill>
+                            <a:srgbClr val="FFFFFF"/>
+                          </a:solidFill>
+                          <a:latin typeface="Microsoft YaHei"/>
+                        </a:rPr>
+                        <a:t>故障</a:t>
+                      </a:r>
+                    </a:p>
+                  </a:txBody>
+                  <a:tcPr marL="54864" marR="54864" marT="18288" marB="18288" anchor="ctr">
+                    <a:solidFill>
+                      <a:srgbClr val="2E6FB5"/>
+                    </a:solidFill>
+                  </a:tcPr>
+                </a:tc>
+                <a:tc>
+                  <a:txBody>
+                    <a:bodyPr/>
+                    <a:lstStyle/>
+                    <a:p>
+                      <a:pPr algn="ctr"/>
+                      <a:r>
+                        <a:rPr sz="1050" b="1">
+                          <a:solidFill>
+                            <a:srgbClr val="FFFFFF"/>
+                          </a:solidFill>
+                          <a:latin typeface="Microsoft YaHei"/>
+                        </a:rPr>
+                        <a:t>检测/恢复</a:t>
+                      </a:r>
+                    </a:p>
+                  </a:txBody>
+                  <a:tcPr marL="54864" marR="54864" marT="18288" marB="18288" anchor="ctr">
+                    <a:solidFill>
+                      <a:srgbClr val="2E6FB5"/>
+                    </a:solidFill>
+                  </a:tcPr>
+                </a:tc>
+                <a:tc>
+                  <a:txBody>
+                    <a:bodyPr/>
+                    <a:lstStyle/>
+                    <a:p>
+                      <a:pPr algn="ctr"/>
+                      <a:r>
+                        <a:rPr sz="1050" b="1">
+                          <a:solidFill>
+                            <a:srgbClr val="FFFFFF"/>
+                          </a:solidFill>
+                          <a:latin typeface="Microsoft YaHei"/>
+                        </a:rPr>
+                        <a:t>RTO</a:t>
+                      </a:r>
+                    </a:p>
+                  </a:txBody>
+                  <a:tcPr marL="54864" marR="54864" marT="18288" marB="18288" anchor="ctr">
+                    <a:solidFill>
+                      <a:srgbClr val="2E6FB5"/>
+                    </a:solidFill>
+                  </a:tcPr>
+                </a:tc>
+                <a:tc>
+                  <a:txBody>
+                    <a:bodyPr/>
+                    <a:lstStyle/>
+                    <a:p>
+                      <a:pPr algn="ctr"/>
+                      <a:r>
+                        <a:rPr sz="1050" b="1">
+                          <a:solidFill>
+                            <a:srgbClr val="FFFFFF"/>
+                          </a:solidFill>
+                          <a:latin typeface="Microsoft YaHei"/>
+                        </a:rPr>
+                        <a:t>失败/RPO</a:t>
+                      </a:r>
+                    </a:p>
+                  </a:txBody>
+                  <a:tcPr marL="54864" marR="54864" marT="18288" marB="18288" anchor="ctr">
+                    <a:solidFill>
+                      <a:srgbClr val="2E6FB5"/>
+                    </a:solidFill>
+                  </a:tcPr>
+                </a:tc>
+                <a:extLst>
+                  <a:ext uri="{0D108BD9-81ED-4DB2-BD59-A6C34878D82A}">
+                    <a16:rowId xmlns:a16="http://schemas.microsoft.com/office/drawing/2014/main" val="10000"/>
+                  </a:ext>
+                </a:extLst>
+              </a:tr>
+              <a:tr h="365760">
+                <a:tc>
+                  <a:txBody>
+                    <a:bodyPr/>
+                    <a:lstStyle/>
+                    <a:p>
+                      <a:pPr algn="l"/>
+                      <a:r>
+                        <a:rPr sz="1050" b="1">
+                          <a:solidFill>
+                            <a:srgbClr val="1E293B"/>
+                          </a:solidFill>
+                          <a:latin typeface="Microsoft YaHei"/>
+                        </a:rPr>
+                        <a:t>B 冻结无重试</a:t>
+                      </a:r>
+                    </a:p>
+                  </a:txBody>
+                  <a:tcPr marL="54864" marR="54864" marT="18288" marB="18288" anchor="ctr">
+                    <a:solidFill>
+                      <a:srgbClr val="FFFFFF"/>
+                    </a:solidFill>
+                  </a:tcPr>
+                </a:tc>
+                <a:tc>
+                  <a:txBody>
+                    <a:bodyPr/>
+                    <a:lstStyle/>
+                    <a:p>
+                      <a:pPr algn="ctr"/>
+                      <a:r>
+                        <a:rPr sz="1050" b="0">
+                          <a:solidFill>
+                            <a:srgbClr val="1E293B"/>
+                          </a:solidFill>
+                          <a:latin typeface="Microsoft YaHei"/>
+                        </a:rPr>
+                        <a:t>延迟容错避开</a:t>
+                      </a:r>
+                    </a:p>
+                  </a:txBody>
+                  <a:tcPr marL="54864" marR="54864" marT="18288" marB="18288" anchor="ctr">
+                    <a:solidFill>
+                      <a:srgbClr val="FFFFFF"/>
+                    </a:solidFill>
+                  </a:tcPr>
+                </a:tc>
+                <a:tc>
+                  <a:txBody>
+                    <a:bodyPr/>
+                    <a:lstStyle/>
+                    <a:p>
+                      <a:pPr algn="ctr"/>
+                      <a:r>
+                        <a:rPr sz="1050" b="0">
+                          <a:solidFill>
+                            <a:srgbClr val="1E293B"/>
+                          </a:solidFill>
+                          <a:latin typeface="Microsoft YaHei"/>
+                        </a:rPr>
+                        <a:t>≈9s</a:t>
+                      </a:r>
+                    </a:p>
+                  </a:txBody>
+                  <a:tcPr marL="54864" marR="54864" marT="18288" marB="18288" anchor="ctr">
+                    <a:solidFill>
+                      <a:srgbClr val="FFFFFF"/>
+                    </a:solidFill>
+                  </a:tcPr>
+                </a:tc>
+                <a:tc>
+                  <a:txBody>
+                    <a:bodyPr/>
+                    <a:lstStyle/>
+                    <a:p>
+                      <a:pPr algn="ctr"/>
+                      <a:r>
+                        <a:rPr sz="1050" b="0">
+                          <a:solidFill>
+                            <a:srgbClr val="1E293B"/>
+                          </a:solidFill>
+                          <a:latin typeface="Microsoft YaHei"/>
+                        </a:rPr>
+                        <a:t>32 / 0</a:t>
+                      </a:r>
+                    </a:p>
+                  </a:txBody>
+                  <a:tcPr marL="54864" marR="54864" marT="18288" marB="18288" anchor="ctr">
+                    <a:solidFill>
+                      <a:srgbClr val="FFFFFF"/>
+                    </a:solidFill>
+                  </a:tcPr>
+                </a:tc>
+                <a:extLst>
+                  <a:ext uri="{0D108BD9-81ED-4DB2-BD59-A6C34878D82A}">
+                    <a16:rowId xmlns:a16="http://schemas.microsoft.com/office/drawing/2014/main" val="10001"/>
+                  </a:ext>
+                </a:extLst>
+              </a:tr>
+              <a:tr h="365760">
+                <a:tc>
+                  <a:txBody>
+                    <a:bodyPr/>
+                    <a:lstStyle/>
+                    <a:p>
+                      <a:pPr algn="l"/>
+                      <a:r>
+                        <a:rPr sz="1050" b="1">
+                          <a:solidFill>
+                            <a:srgbClr val="1E293B"/>
+                          </a:solidFill>
+                          <a:latin typeface="Microsoft YaHei"/>
+                        </a:rPr>
+                        <a:t>B 冻结开重试</a:t>
+                      </a:r>
+                    </a:p>
+                  </a:txBody>
+                  <a:tcPr marL="54864" marR="54864" marT="18288" marB="18288" anchor="ctr">
+                    <a:solidFill>
+                      <a:srgbClr val="ECF1F5"/>
+                    </a:solidFill>
+                  </a:tcPr>
+                </a:tc>
+                <a:tc>
+                  <a:txBody>
+                    <a:bodyPr/>
+                    <a:lstStyle/>
+                    <a:p>
+                      <a:pPr algn="ctr"/>
+                      <a:r>
+                        <a:rPr sz="1050" b="0">
+                          <a:solidFill>
+                            <a:srgbClr val="1E293B"/>
+                          </a:solidFill>
+                          <a:latin typeface="Microsoft YaHei"/>
+                        </a:rPr>
+                        <a:t>客户端重试</a:t>
+                      </a:r>
+                    </a:p>
+                  </a:txBody>
+                  <a:tcPr marL="54864" marR="54864" marT="18288" marB="18288" anchor="ctr">
+                    <a:solidFill>
+                      <a:srgbClr val="ECF1F5"/>
+                    </a:solidFill>
+                  </a:tcPr>
+                </a:tc>
+                <a:tc>
+                  <a:txBody>
+                    <a:bodyPr/>
+                    <a:lstStyle/>
+                    <a:p>
+                      <a:pPr algn="ctr"/>
+                      <a:r>
+                        <a:rPr sz="1050" b="0">
+                          <a:solidFill>
+                            <a:srgbClr val="1E293B"/>
+                          </a:solidFill>
+                          <a:latin typeface="Microsoft YaHei"/>
+                        </a:rPr>
+                        <a:t>≈0</a:t>
+                      </a:r>
+                    </a:p>
+                  </a:txBody>
+                  <a:tcPr marL="54864" marR="54864" marT="18288" marB="18288" anchor="ctr">
+                    <a:solidFill>
+                      <a:srgbClr val="ECF1F5"/>
+                    </a:solidFill>
+                  </a:tcPr>
+                </a:tc>
+                <a:tc>
+                  <a:txBody>
+                    <a:bodyPr/>
+                    <a:lstStyle/>
+                    <a:p>
+                      <a:pPr algn="ctr"/>
+                      <a:r>
+                        <a:rPr sz="1050" b="0">
+                          <a:solidFill>
+                            <a:srgbClr val="1E293B"/>
+                          </a:solidFill>
+                          <a:latin typeface="Microsoft YaHei"/>
+                        </a:rPr>
+                        <a:t>0 / 0</a:t>
+                      </a:r>
+                    </a:p>
+                  </a:txBody>
+                  <a:tcPr marL="54864" marR="54864" marT="18288" marB="18288" anchor="ctr">
+                    <a:solidFill>
+                      <a:srgbClr val="ECF1F5"/>
+                    </a:solidFill>
+                  </a:tcPr>
+                </a:tc>
+                <a:extLst>
+                  <a:ext uri="{0D108BD9-81ED-4DB2-BD59-A6C34878D82A}">
+                    <a16:rowId xmlns:a16="http://schemas.microsoft.com/office/drawing/2014/main" val="10002"/>
+                  </a:ext>
+                </a:extLst>
+              </a:tr>
+              <a:tr h="365760">
+                <a:tc>
+                  <a:txBody>
+                    <a:bodyPr/>
+                    <a:lstStyle/>
+                    <a:p>
+                      <a:pPr algn="l"/>
+                      <a:r>
+                        <a:rPr sz="1050" b="1">
+                          <a:solidFill>
+                            <a:srgbClr val="1E293B"/>
+                          </a:solidFill>
+                          <a:latin typeface="Microsoft YaHei"/>
+                        </a:rPr>
+                        <a:t>C 优雅停</a:t>
+                      </a:r>
+                    </a:p>
+                  </a:txBody>
+                  <a:tcPr marL="54864" marR="54864" marT="18288" marB="18288" anchor="ctr">
+                    <a:solidFill>
+                      <a:srgbClr val="FFFFFF"/>
+                    </a:solidFill>
+                  </a:tcPr>
+                </a:tc>
+                <a:tc>
+                  <a:txBody>
+                    <a:bodyPr/>
+                    <a:lstStyle/>
+                    <a:p>
+                      <a:pPr algn="ctr"/>
+                      <a:r>
+                        <a:rPr sz="1050" b="0">
+                          <a:solidFill>
+                            <a:srgbClr val="1E293B"/>
+                          </a:solidFill>
+                          <a:latin typeface="Microsoft YaHei"/>
+                        </a:rPr>
+                        <a:t>FIN ~1s</a:t>
+                      </a:r>
+                    </a:p>
+                  </a:txBody>
+                  <a:tcPr marL="54864" marR="54864" marT="18288" marB="18288" anchor="ctr">
+                    <a:solidFill>
+                      <a:srgbClr val="FFFFFF"/>
+                    </a:solidFill>
+                  </a:tcPr>
+                </a:tc>
+                <a:tc>
+                  <a:txBody>
+                    <a:bodyPr/>
+                    <a:lstStyle/>
+                    <a:p>
+                      <a:pPr algn="ctr"/>
+                      <a:r>
+                        <a:rPr sz="1050" b="0">
+                          <a:solidFill>
+                            <a:srgbClr val="1E293B"/>
+                          </a:solidFill>
+                          <a:latin typeface="Microsoft YaHei"/>
+                        </a:rPr>
+                        <a:t>≈0s</a:t>
+                      </a:r>
+                    </a:p>
+                  </a:txBody>
+                  <a:tcPr marL="54864" marR="54864" marT="18288" marB="18288" anchor="ctr">
+                    <a:solidFill>
+                      <a:srgbClr val="FFFFFF"/>
+                    </a:solidFill>
+                  </a:tcPr>
+                </a:tc>
+                <a:tc>
+                  <a:txBody>
+                    <a:bodyPr/>
+                    <a:lstStyle/>
+                    <a:p>
+                      <a:pPr algn="ctr"/>
+                      <a:r>
+                        <a:rPr sz="1050" b="0">
+                          <a:solidFill>
+                            <a:srgbClr val="1E293B"/>
+                          </a:solidFill>
+                          <a:latin typeface="Microsoft YaHei"/>
+                        </a:rPr>
+                        <a:t>0 / 0</a:t>
+                      </a:r>
+                    </a:p>
+                  </a:txBody>
+                  <a:tcPr marL="54864" marR="54864" marT="18288" marB="18288" anchor="ctr">
+                    <a:solidFill>
+                      <a:srgbClr val="FFFFFF"/>
+                    </a:solidFill>
+                  </a:tcPr>
+                </a:tc>
+                <a:extLst>
+                  <a:ext uri="{0D108BD9-81ED-4DB2-BD59-A6C34878D82A}">
+                    <a16:rowId xmlns:a16="http://schemas.microsoft.com/office/drawing/2014/main" val="10003"/>
+                  </a:ext>
+                </a:extLst>
+              </a:tr>
+              <a:tr h="365760">
+                <a:tc>
+                  <a:txBody>
+                    <a:bodyPr/>
+                    <a:lstStyle/>
+                    <a:p>
+                      <a:pPr algn="l"/>
+                      <a:r>
+                        <a:rPr sz="1050" b="1">
+                          <a:solidFill>
+                            <a:srgbClr val="1E293B"/>
+                          </a:solidFill>
+                          <a:latin typeface="Microsoft YaHei"/>
+                        </a:rPr>
+                        <a:t>D 硬断电</a:t>
+                      </a:r>
+                    </a:p>
+                  </a:txBody>
+                  <a:tcPr marL="54864" marR="54864" marT="18288" marB="18288" anchor="ctr">
+                    <a:solidFill>
+                      <a:srgbClr val="ECF1F5"/>
+                    </a:solidFill>
+                  </a:tcPr>
+                </a:tc>
+                <a:tc>
+                  <a:txBody>
+                    <a:bodyPr/>
+                    <a:lstStyle/>
+                    <a:p>
+                      <a:pPr algn="ctr"/>
+                      <a:r>
+                        <a:rPr sz="1050" b="0">
+                          <a:solidFill>
+                            <a:srgbClr val="1E293B"/>
+                          </a:solidFill>
+                          <a:latin typeface="Microsoft YaHei"/>
+                        </a:rPr>
+                        <a:t>broker重启回归~50s</a:t>
+                      </a:r>
+                    </a:p>
+                  </a:txBody>
+                  <a:tcPr marL="54864" marR="54864" marT="18288" marB="18288" anchor="ctr">
+                    <a:solidFill>
+                      <a:srgbClr val="ECF1F5"/>
+                    </a:solidFill>
+                  </a:tcPr>
+                </a:tc>
+                <a:tc>
+                  <a:txBody>
+                    <a:bodyPr/>
+                    <a:lstStyle/>
+                    <a:p>
+                      <a:pPr algn="ctr"/>
+                      <a:r>
+                        <a:rPr sz="1050" b="0">
+                          <a:solidFill>
+                            <a:srgbClr val="1E293B"/>
+                          </a:solidFill>
+                          <a:latin typeface="Microsoft YaHei"/>
+                        </a:rPr>
+                        <a:t>≈60s</a:t>
+                      </a:r>
+                    </a:p>
+                  </a:txBody>
+                  <a:tcPr marL="54864" marR="54864" marT="18288" marB="18288" anchor="ctr">
+                    <a:solidFill>
+                      <a:srgbClr val="ECF1F5"/>
+                    </a:solidFill>
+                  </a:tcPr>
+                </a:tc>
+                <a:tc>
+                  <a:txBody>
+                    <a:bodyPr/>
+                    <a:lstStyle/>
+                    <a:p>
+                      <a:pPr algn="ctr"/>
+                      <a:r>
+                        <a:rPr sz="1050" b="0">
+                          <a:solidFill>
+                            <a:srgbClr val="1E293B"/>
+                          </a:solidFill>
+                          <a:latin typeface="Microsoft YaHei"/>
+                        </a:rPr>
+                        <a:t>38 / 0</a:t>
+                      </a:r>
+                    </a:p>
+                  </a:txBody>
+                  <a:tcPr marL="54864" marR="54864" marT="18288" marB="18288" anchor="ctr">
+                    <a:solidFill>
+                      <a:srgbClr val="ECF1F5"/>
+                    </a:solidFill>
+                  </a:tcPr>
+                </a:tc>
+                <a:extLst>
+                  <a:ext uri="{0D108BD9-81ED-4DB2-BD59-A6C34878D82A}">
+                    <a16:rowId xmlns:a16="http://schemas.microsoft.com/office/drawing/2014/main" val="10004"/>
+                  </a:ext>
+                </a:extLst>
+              </a:tr>
+              <a:tr h="365760">
+                <a:tc>
+                  <a:txBody>
+                    <a:bodyPr/>
+                    <a:lstStyle/>
+                    <a:p>
+                      <a:pPr algn="l"/>
+                      <a:r>
+                        <a:rPr sz="1050" b="1">
+                          <a:solidFill>
+                            <a:srgbClr val="1E293B"/>
+                          </a:solidFill>
+                          <a:latin typeface="Microsoft YaHei"/>
+                        </a:rPr>
+                        <a:t>RPO 校验</a:t>
+                      </a:r>
+                    </a:p>
+                  </a:txBody>
+                  <a:tcPr marL="54864" marR="54864" marT="18288" marB="18288" anchor="ctr">
+                    <a:solidFill>
+                      <a:srgbClr val="FFFFFF"/>
+                    </a:solidFill>
+                  </a:tcPr>
+                </a:tc>
+                <a:tc>
+                  <a:txBody>
+                    <a:bodyPr/>
+                    <a:lstStyle/>
+                    <a:p>
+                      <a:pPr algn="ctr"/>
+                      <a:r>
+                        <a:rPr sz="1050" b="0">
+                          <a:solidFill>
+                            <a:srgbClr val="1E293B"/>
+                          </a:solidFill>
+                          <a:latin typeface="Microsoft YaHei"/>
+                        </a:rPr>
+                        <a:t>整组断电(主+从)</a:t>
+                      </a:r>
+                    </a:p>
+                  </a:txBody>
+                  <a:tcPr marL="54864" marR="54864" marT="18288" marB="18288" anchor="ctr">
+                    <a:solidFill>
+                      <a:srgbClr val="FFFFFF"/>
+                    </a:solidFill>
+                  </a:tcPr>
+                </a:tc>
+                <a:tc>
+                  <a:txBody>
+                    <a:bodyPr/>
+                    <a:lstStyle/>
+                    <a:p>
+                      <a:pPr algn="ctr"/>
+                      <a:r>
+                        <a:rPr sz="1050" b="0">
+                          <a:solidFill>
+                            <a:srgbClr val="1E293B"/>
+                          </a:solidFill>
+                          <a:latin typeface="Microsoft YaHei"/>
+                        </a:rPr>
+                        <a:t>—</a:t>
+                      </a:r>
+                    </a:p>
+                  </a:txBody>
+                  <a:tcPr marL="54864" marR="54864" marT="18288" marB="18288" anchor="ctr">
+                    <a:solidFill>
+                      <a:srgbClr val="FFFFFF"/>
+                    </a:solidFill>
+                  </a:tcPr>
+                </a:tc>
+                <a:tc>
+                  <a:txBody>
+                    <a:bodyPr/>
+                    <a:lstStyle/>
+                    <a:p>
+                      <a:pPr algn="ctr"/>
+                      <a:r>
+                        <a:rPr sz="1050" b="0">
+                          <a:solidFill>
+                            <a:srgbClr val="1E293B"/>
+                          </a:solidFill>
+                          <a:latin typeface="Microsoft YaHei"/>
+                        </a:rPr>
+                        <a:t>unique=47,423 / 0</a:t>
+                      </a:r>
+                    </a:p>
+                  </a:txBody>
+                  <a:tcPr marL="54864" marR="54864" marT="18288" marB="18288" anchor="ctr">
+                    <a:solidFill>
+                      <a:srgbClr val="FFFFFF"/>
+                    </a:solidFill>
+                  </a:tcPr>
+                </a:tc>
+                <a:extLst>
+                  <a:ext uri="{0D108BD9-81ED-4DB2-BD59-A6C34878D82A}">
+                    <a16:rowId xmlns:a16="http://schemas.microsoft.com/office/drawing/2014/main" val="10005"/>
+                  </a:ext>
+                </a:extLst>
+              </a:tr>
+            </a:tbl>
+          </a:graphicData>
+        </a:graphic>
+      </p:graphicFrame>
+      <p:sp>
+        <p:nvSpPr>
+          <p:cNvPr id="12" name="TextBox 11"/>
+          <p:cNvSpPr txBox="1"/>
+          <p:nvPr/>
+        </p:nvSpPr>
+        <p:spPr>
+          <a:xfrm>
+            <a:off x="502920" y="6455664"/>
+            <a:ext cx="7315200" cy="274320"/>
+          </a:xfrm>
+          <a:prstGeom prst="rect">
+            <a:avLst/>
+          </a:prstGeom>
+          <a:noFill/>
+        </p:spPr>
+        <p:txBody>
+          <a:bodyPr wrap="square" lIns="0" tIns="0" rIns="0" bIns="0" anchor="t">
+            <a:spAutoFit/>
+          </a:bodyPr>
+          <a:lstStyle/>
+          <a:p>
+            <a:pPr algn="l"/>
+            <a:r>
+              <a:rPr sz="900" b="0" i="0">
+                <a:solidFill>
+                  <a:srgbClr val="5B6677"/>
+                </a:solidFill>
+                <a:latin typeface="Microsoft YaHei"/>
+              </a:rPr>
+              <a:t>RocketMQ 4.9.7 三方案性能与故障演练对比  ·  germanywestcentral</a:t>
+            </a:r>
+          </a:p>
+        </p:txBody>
+      </p:sp>
+      <p:sp>
+        <p:nvSpPr>
+          <p:cNvPr id="13" name="TextBox 12"/>
+          <p:cNvSpPr txBox="1"/>
+          <p:nvPr/>
+        </p:nvSpPr>
+        <p:spPr>
+          <a:xfrm>
+            <a:off x="10789920" y="6455664"/>
+            <a:ext cx="868680" cy="274320"/>
+          </a:xfrm>
+          <a:prstGeom prst="rect">
+            <a:avLst/>
+          </a:prstGeom>
+          <a:noFill/>
+        </p:spPr>
+        <p:txBody>
+          <a:bodyPr wrap="square" lIns="0" tIns="0" rIns="0" bIns="0" anchor="t">
+            <a:spAutoFit/>
+          </a:bodyPr>
+          <a:lstStyle/>
+          <a:p>
+            <a:pPr algn="r"/>
+            <a:r>
+              <a:rPr sz="900" b="0" i="0">
+                <a:solidFill>
+                  <a:srgbClr val="5B6677"/>
+                </a:solidFill>
+                <a:latin typeface="Microsoft YaHei"/>
+              </a:rPr>
+              <a:t>19</a:t>
+            </a:r>
+          </a:p>
+        </p:txBody>
+      </p:sp>
+    </p:spTree>
+  </p:cSld>
+  <p:clrMapOvr>
+    <a:masterClrMapping/>
+  </p:clrMapOvr>
+</p:sld>
+</file>
+
 <file path=ppt/slides/slide2.xml><?xml version="1.0" encoding="utf-8"?>
 <p:sld xmlns:a="http://schemas.openxmlformats.org/drawingml/2006/main" xmlns:r="http://schemas.openxmlformats.org/officeDocument/2006/relationships" xmlns:p="http://schemas.openxmlformats.org/presentationml/2006/main">
   <p:cSld>
@@ -18934,7 +20923,7 @@
                 </a:solidFill>
                 <a:latin typeface="Microsoft YaHei"/>
               </a:rPr>
-              <a:t>  从故障注入到客户端恢复正常发送的时间。受故障检测机制 + 客户端路由刷新周期共同影响。</a:t>
+              <a:t xml:space="preserve">  从故障注入到客户端恢复正常发送的时间。受故障检测机制 + 客户端路由刷新周期共同影响。</a:t>
             </a:r>
           </a:p>
           <a:p>
@@ -18962,7 +20951,7 @@
                 </a:solidFill>
                 <a:latin typeface="Microsoft YaHei"/>
               </a:rPr>
-              <a:t>  已成功 ack 的消息是否丢失。由 verify 去重 dup 计数实测，0 表示零丢失。</a:t>
+              <a:t xml:space="preserve">  已成功 ack 的消息是否丢失。由 verify 去重 dup 计数实测，0 表示零丢失。</a:t>
             </a:r>
           </a:p>
         </p:txBody>
@@ -20618,7 +22607,13 @@
           <p:cNvGraphicFramePr>
             <a:graphicFrameLocks noGrp="1"/>
           </p:cNvGraphicFramePr>
-          <p:nvPr/>
+          <p:nvPr>
+            <p:extLst>
+              <p:ext uri="{D42A27DB-BD31-4B8C-83A1-F6EECF244321}">
+                <p14:modId xmlns:p14="http://schemas.microsoft.com/office/powerpoint/2010/main" val="879540302"/>
+              </p:ext>
+            </p:extLst>
+          </p:nvPr>
         </p:nvGraphicFramePr>
         <p:xfrm>
           <a:off x="502920" y="1417320"/>
@@ -21186,14 +23181,47 @@
                     <a:p>
                       <a:pPr algn="ctr"/>
                       <a:r>
-                        <a:rPr sz="1200" b="0">
-                          <a:solidFill>
-                            <a:srgbClr val="1E293B"/>
-                          </a:solidFill>
-                          <a:latin typeface="Microsoft YaHei"/>
-                        </a:rPr>
-                        <a:t>/datadisk SSD</a:t>
-                      </a:r>
+                        <a:rPr sz="1200" b="0" dirty="0">
+                          <a:solidFill>
+                            <a:srgbClr val="1E293B"/>
+                          </a:solidFill>
+                          <a:latin typeface="Microsoft YaHei"/>
+                        </a:rPr>
+                        <a:t>/</a:t>
+                      </a:r>
+                      <a:r>
+                        <a:rPr sz="1200" b="0" dirty="0" err="1">
+                          <a:solidFill>
+                            <a:srgbClr val="1E293B"/>
+                          </a:solidFill>
+                          <a:latin typeface="Microsoft YaHei"/>
+                        </a:rPr>
+                        <a:t>datadisk</a:t>
+                      </a:r>
+                      <a:r>
+                        <a:rPr sz="1200" b="0" dirty="0">
+                          <a:solidFill>
+                            <a:srgbClr val="1E293B"/>
+                          </a:solidFill>
+                          <a:latin typeface="Microsoft YaHei"/>
+                        </a:rPr>
+                        <a:t xml:space="preserve"> SSD</a:t>
+                      </a:r>
+                      <a:r>
+                        <a:rPr lang="en-US" sz="1200" b="0" dirty="0">
+                          <a:solidFill>
+                            <a:srgbClr val="1E293B"/>
+                          </a:solidFill>
+                          <a:latin typeface="Microsoft YaHei"/>
+                        </a:rPr>
+                        <a:t xml:space="preserve"> v2(3000iops, 125mbps)</a:t>
+                      </a:r>
+                      <a:endParaRPr sz="1200" b="0" dirty="0">
+                        <a:solidFill>
+                          <a:srgbClr val="1E293B"/>
+                        </a:solidFill>
+                        <a:latin typeface="Microsoft YaHei"/>
+                      </a:endParaRPr>
                     </a:p>
                   </a:txBody>
                   <a:tcPr marL="54864" marR="54864" marT="18288" marB="18288" anchor="ctr">
@@ -21207,16 +23235,54 @@
                     <a:bodyPr/>
                     <a:lstStyle/>
                     <a:p>
-                      <a:pPr algn="ctr"/>
-                      <a:r>
-                        <a:rPr sz="1200" b="0">
-                          <a:solidFill>
-                            <a:srgbClr val="1E293B"/>
-                          </a:solidFill>
-                          <a:latin typeface="Microsoft YaHei"/>
-                        </a:rPr>
-                        <a:t>/datadisk SSD</a:t>
-                      </a:r>
+                      <a:pPr marL="0" marR="0" lvl="0" indent="0" algn="ctr" defTabSz="457200" rtl="0" eaLnBrk="1" fontAlgn="auto" latinLnBrk="0" hangingPunct="1">
+                        <a:lnSpc>
+                          <a:spcPct val="100000"/>
+                        </a:lnSpc>
+                        <a:spcBef>
+                          <a:spcPts val="0"/>
+                        </a:spcBef>
+                        <a:spcAft>
+                          <a:spcPts val="0"/>
+                        </a:spcAft>
+                        <a:buClrTx/>
+                        <a:buSzTx/>
+                        <a:buFontTx/>
+                        <a:buNone/>
+                        <a:tabLst/>
+                        <a:defRPr/>
+                      </a:pPr>
+                      <a:r>
+                        <a:rPr kumimoji="0" lang="en-US" altLang="zh-CN" sz="1200" b="0" i="0" u="none" strike="noStrike" kern="1200" cap="none" spc="0" normalizeH="0" baseline="0" noProof="0">
+                          <a:ln>
+                            <a:noFill/>
+                          </a:ln>
+                          <a:solidFill>
+                            <a:srgbClr val="1E293B"/>
+                          </a:solidFill>
+                          <a:effectLst/>
+                          <a:uLnTx/>
+                          <a:uFillTx/>
+                          <a:latin typeface="Microsoft YaHei"/>
+                          <a:ea typeface="宋体" panose="02010600030101010101" pitchFamily="2" charset="-122"/>
+                          <a:cs typeface="+mn-cs"/>
+                        </a:rPr>
+                        <a:t>/datadisk SSD v2(3000iops, 125mbps)</a:t>
+                      </a:r>
+                      <a:endParaRPr kumimoji="0" lang="en-US" altLang="zh-CN" sz="1200" b="0" i="0" u="none" strike="noStrike" kern="1200" cap="none" spc="0" normalizeH="0" baseline="0" noProof="0" dirty="0">
+                        <a:ln>
+                          <a:noFill/>
+                        </a:ln>
+                        <a:solidFill>
+                          <a:srgbClr val="1E293B"/>
+                        </a:solidFill>
+                        <a:effectLst/>
+                        <a:uLnTx/>
+                        <a:uFillTx/>
+                        <a:latin typeface="Microsoft YaHei"/>
+                        <a:ea typeface="宋体" panose="02010600030101010101" pitchFamily="2" charset="-122"/>
+                        <a:cs typeface="+mn-cs"/>
+                      </a:endParaRPr>
                     </a:p>
                   </a:txBody>
                   <a:tcPr marL="54864" marR="54864" marT="18288" marB="18288" anchor="ctr">
@@ -21230,15 +23296,73 @@
                     <a:bodyPr/>
                     <a:lstStyle/>
                     <a:p>
-                      <a:pPr algn="ctr"/>
-                      <a:r>
-                        <a:rPr sz="1200" b="0">
-                          <a:solidFill>
-                            <a:srgbClr val="1E293B"/>
-                          </a:solidFill>
-                          <a:latin typeface="Microsoft YaHei"/>
-                        </a:rPr>
-                        <a:t>/datadisk SSD</a:t>
+                      <a:pPr marL="0" marR="0" lvl="0" indent="0" algn="ctr" defTabSz="457200" rtl="0" eaLnBrk="1" fontAlgn="auto" latinLnBrk="0" hangingPunct="1">
+                        <a:lnSpc>
+                          <a:spcPct val="100000"/>
+                        </a:lnSpc>
+                        <a:spcBef>
+                          <a:spcPts val="0"/>
+                        </a:spcBef>
+                        <a:spcAft>
+                          <a:spcPts val="0"/>
+                        </a:spcAft>
+                        <a:buClrTx/>
+                        <a:buSzTx/>
+                        <a:buFontTx/>
+                        <a:buNone/>
+                        <a:tabLst/>
+                        <a:defRPr/>
+                      </a:pPr>
+                      <a:r>
+                        <a:rPr kumimoji="0" lang="en-US" altLang="zh-CN" sz="1200" b="0" i="0" u="none" strike="noStrike" kern="1200" cap="none" spc="0" normalizeH="0" baseline="0" noProof="0" dirty="0">
+                          <a:ln>
+                            <a:noFill/>
+                          </a:ln>
+                          <a:solidFill>
+                            <a:srgbClr val="1E293B"/>
+                          </a:solidFill>
+                          <a:effectLst/>
+                          <a:uLnTx/>
+                          <a:uFillTx/>
+                          <a:latin typeface="Microsoft YaHei"/>
+                          <a:ea typeface="宋体" panose="02010600030101010101" pitchFamily="2" charset="-122"/>
+                          <a:cs typeface="+mn-cs"/>
+                        </a:rPr>
+                        <a:t>/</a:t>
+                      </a:r>
+                      <a:r>
+                        <a:rPr kumimoji="0" lang="en-US" altLang="zh-CN" sz="1200" b="0" i="0" u="none" strike="noStrike" kern="1200" cap="none" spc="0" normalizeH="0" baseline="0" noProof="0" dirty="0" err="1">
+                          <a:ln>
+                            <a:noFill/>
+                          </a:ln>
+                          <a:solidFill>
+                            <a:srgbClr val="1E293B"/>
+                          </a:solidFill>
+                          <a:effectLst/>
+                          <a:uLnTx/>
+                          <a:uFillTx/>
+                          <a:latin typeface="Microsoft YaHei"/>
+                          <a:ea typeface="宋体" panose="02010600030101010101" pitchFamily="2" charset="-122"/>
+                          <a:cs typeface="+mn-cs"/>
+                        </a:rPr>
+                        <a:t>datadisk</a:t>
+                      </a:r>
+                      <a:r>
+                        <a:rPr kumimoji="0" lang="en-US" altLang="zh-CN" sz="1200" b="0" i="0" u="none" strike="noStrike" kern="1200" cap="none" spc="0" normalizeH="0" baseline="0" noProof="0" dirty="0">
+                          <a:ln>
+                            <a:noFill/>
+                          </a:ln>
+                          <a:solidFill>
+                            <a:srgbClr val="1E293B"/>
+                          </a:solidFill>
+                          <a:effectLst/>
+                          <a:uLnTx/>
+                          <a:uFillTx/>
+                          <a:latin typeface="Microsoft YaHei"/>
+                          <a:ea typeface="宋体" panose="02010600030101010101" pitchFamily="2" charset="-122"/>
+                          <a:cs typeface="+mn-cs"/>
+                        </a:rPr>
+                        <a:t xml:space="preserve"> SSD v2(3000iops, 125mbps)</a:t>
                       </a:r>
                     </a:p>
                   </a:txBody>
@@ -21291,7 +23415,34 @@
                           </a:solidFill>
                           <a:latin typeface="Microsoft YaHei"/>
                         </a:rPr>
-                        <a:t>Rocky 9 / JDK11</a:t>
+                        <a:t>Rocky 9</a:t>
+                      </a:r>
+                      <a:r>
+                        <a:rPr lang="en-US" sz="1200" b="0">
+                          <a:solidFill>
+                            <a:srgbClr val="1E293B"/>
+                          </a:solidFill>
+                          <a:latin typeface="Microsoft YaHei"/>
+                        </a:rPr>
+                        <a:t>.8</a:t>
+                      </a:r>
+                      <a:r>
+                        <a:rPr sz="1200" b="0">
+                          <a:solidFill>
+                            <a:srgbClr val="1E293B"/>
+                          </a:solidFill>
+                          <a:latin typeface="Microsoft YaHei"/>
+                        </a:rPr>
+                        <a:t xml:space="preserve"> </a:t>
+                      </a:r>
+                      <a:r>
+                        <a:rPr sz="1200" b="0" dirty="0">
+                          <a:solidFill>
+                            <a:srgbClr val="1E293B"/>
+                          </a:solidFill>
+                          <a:latin typeface="Microsoft YaHei"/>
+                        </a:rPr>
+                        <a:t>/ JDK11</a:t>
                       </a:r>
                     </a:p>
                   </a:txBody>
@@ -21308,13 +23459,31 @@
                     <a:p>
                       <a:pPr algn="ctr"/>
                       <a:r>
-                        <a:rPr sz="1200" b="0">
-                          <a:solidFill>
-                            <a:srgbClr val="1E293B"/>
-                          </a:solidFill>
-                          <a:latin typeface="Microsoft YaHei"/>
-                        </a:rPr>
-                        <a:t>Rocky 9 / JDK11</a:t>
+                        <a:rPr sz="1200" b="0" dirty="0">
+                          <a:solidFill>
+                            <a:srgbClr val="1E293B"/>
+                          </a:solidFill>
+                          <a:latin typeface="Microsoft YaHei"/>
+                        </a:rPr>
+                        <a:t>Rocky 9</a:t>
+                      </a:r>
+                      <a:r>
+                        <a:rPr lang="en-US" sz="1200" b="0" dirty="0">
+                          <a:solidFill>
+                            <a:srgbClr val="1E293B"/>
+                          </a:solidFill>
+                          <a:latin typeface="Microsoft YaHei"/>
+                        </a:rPr>
+                        <a:t>.8</a:t>
+                      </a:r>
+                      <a:r>
+                        <a:rPr sz="1200" b="0" dirty="0">
+                          <a:solidFill>
+                            <a:srgbClr val="1E293B"/>
+                          </a:solidFill>
+                          <a:latin typeface="Microsoft YaHei"/>
+                        </a:rPr>
+                        <a:t xml:space="preserve"> / JDK11</a:t>
                       </a:r>
                     </a:p>
                   </a:txBody>
@@ -21331,13 +23500,31 @@
                     <a:p>
                       <a:pPr algn="ctr"/>
                       <a:r>
-                        <a:rPr sz="1200" b="0">
-                          <a:solidFill>
-                            <a:srgbClr val="1E293B"/>
-                          </a:solidFill>
-                          <a:latin typeface="Microsoft YaHei"/>
-                        </a:rPr>
-                        <a:t>Rocky 9 / JDK11</a:t>
+                        <a:rPr sz="1200" b="0" dirty="0">
+                          <a:solidFill>
+                            <a:srgbClr val="1E293B"/>
+                          </a:solidFill>
+                          <a:latin typeface="Microsoft YaHei"/>
+                        </a:rPr>
+                        <a:t>Rocky 9</a:t>
+                      </a:r>
+                      <a:r>
+                        <a:rPr lang="en-US" sz="1200" b="0" dirty="0">
+                          <a:solidFill>
+                            <a:srgbClr val="1E293B"/>
+                          </a:solidFill>
+                          <a:latin typeface="Microsoft YaHei"/>
+                        </a:rPr>
+                        <a:t>.8</a:t>
+                      </a:r>
+                      <a:r>
+                        <a:rPr sz="1200" b="0" dirty="0">
+                          <a:solidFill>
+                            <a:srgbClr val="1E293B"/>
+                          </a:solidFill>
+                          <a:latin typeface="Microsoft YaHei"/>
+                        </a:rPr>
+                        <a:t xml:space="preserve"> / JDK11</a:t>
                       </a:r>
                     </a:p>
                   </a:txBody>
